--- a/SDC/教学资料/课件/T7-编码、测试与部署.pptx
+++ b/SDC/教学资料/课件/T7-编码、测试与部署.pptx
@@ -35,10 +35,10 @@
     <p:sldId id="273" r:id="rId26"/>
     <p:sldId id="274" r:id="rId27"/>
     <p:sldId id="301" r:id="rId57"/>
+    <p:sldId id="277" r:id="rId30"/>
+    <p:sldId id="278" r:id="rId31"/>
     <p:sldId id="275" r:id="rId28"/>
     <p:sldId id="276" r:id="rId29"/>
-    <p:sldId id="277" r:id="rId30"/>
-    <p:sldId id="278" r:id="rId31"/>
     <p:sldId id="279" r:id="rId32"/>
     <p:sldId id="281" r:id="rId34"/>
     <p:sldId id="282" r:id="rId35"/>
@@ -2309,7 +2309,7 @@
           </a:p>
           <a:p>
             <a:r>
-              <a:t>权衡：覆盖对象和强度不同，都不能代替业务断言。行与分支的要求见 E3 操作说明。2024 第 5-4 讲第 47–48、55 页只作概念，这一页不展示报告。左侧判定图沿用第 27 页真值表的条件甲、条件乙，只作示意。</a:t>
+              <a:t>权衡：覆盖对象和强度不同，都不能代替业务断言。行与分支的要求见 E3 操作说明。2024 第 5-4 讲第 47–48、55 页只作概念，这一页不展示报告。左侧判定图沿用第 26 页真值表的条件甲、条件乙，只作示意。</a:t>
             </a:r>
           </a:p>
         </p:txBody>

--- a/SDC/教学资料/课件/T7-编码、测试与部署.pptx
+++ b/SDC/教学资料/课件/T7-编码、测试与部署.pptx
@@ -1937,6 +1937,11 @@
               <a:t>权衡：三类会有交叉，例如需求说明既服务开发也服务用户。来源是 2024 第 6-5 讲第 4–7 页。编制可以用文字、图表，也可以用工具生成。三栏下的文档名取自 2024 第 6-5 讲第 5–7 页的列表，只作举例，不是完整清单。</a:t>
             </a:r>
           </a:p>
+          <a:p>
+            <a:r>
+              <a:t>取舍：可选——时间不足时略去，不影响本课重点、后续理解与作业。</a:t>
+            </a:r>
+          </a:p>
         </p:txBody>
       </p:sp>
       <p:sp>
@@ -2127,6 +2132,11 @@
               <a:t>权衡：静态更早，也覆盖不到只有跑起来才出现的路径。V 模型的对应关系和它的局限见 2024 第 5-4 讲第 21、32、42 页；白盒见第 5-5 讲第 13 页。页上图按 2024 第 5-4 讲第 24–25 页的 W 模型重画：在 V 模型上加入与各开发阶段同步的测试设计；开发一支与右侧测试执行一支合起来就是 V 模型的逐级对应。原图“单元设计测试”按第 24 页文意写作“单元测试设计”。2024 没有单独的 V 模型图。</a:t>
             </a:r>
           </a:p>
+          <a:p>
+            <a:r>
+              <a:t>取舍：可选——时间不足时略去，不影响本课重点、后续理解与作业。</a:t>
+            </a:r>
+          </a:p>
         </p:txBody>
       </p:sp>
       <p:sp>
@@ -4414,7 +4424,7 @@
           </a:p>
           <a:p>
             <a:r>
-              <a:t>定义：这三题问提交说明写什么、向后兼容的含义、类名与方法名的词性。</a:t>
+              <a:t>定义：这三题问取消接口的命名、向后兼容的含义、覆盖率指标的作用。</a:t>
             </a:r>
           </a:p>
           <a:p>
@@ -5072,6 +5082,11 @@
               <a:t>权衡：上一页按开发阶段讲对应关系，这一页把阶段、方法、目标拆成三个独立方向；三个方向上的取值都不是封闭清单。</a:t>
             </a:r>
           </a:p>
+          <a:p>
+            <a:r>
+              <a:t>取舍：可选——时间不足时略去，不影响本课重点、后续理解与作业。</a:t>
+            </a:r>
+          </a:p>
         </p:txBody>
       </p:sp>
       <p:sp>
@@ -6291,6 +6306,11 @@
               <a:t>权衡：接口把语法和实现分开，但并不自动把契约和实现分开。来源是 2024 第 4-5 讲第 19–23 页。页上两个小类图据 2024 第 4-5 讲第 19 页的例子画（狮子 IS-A 动物，鸽子 CAN-DO 飞翔），原页只有文字。</a:t>
             </a:r>
           </a:p>
+          <a:p>
+            <a:r>
+              <a:t>取舍：可选——时间不足时略去，不影响本课重点、后续理解与作业。</a:t>
+            </a:r>
+          </a:p>
         </p:txBody>
       </p:sp>
       <p:sp>
@@ -6386,6 +6406,11 @@
               <a:t>权衡：.NET 一侧来自 2024 第 4-3 讲第 26 页。Java 一侧按本课对照：模块、jar 包、包。不在这里展开模块描述文件的字段。</a:t>
             </a:r>
           </a:p>
+          <a:p>
+            <a:r>
+              <a:t>取舍：可选——时间不足时略去，不影响本课重点、后续理解与作业。</a:t>
+            </a:r>
+          </a:p>
         </p:txBody>
       </p:sp>
       <p:sp>
@@ -6479,6 +6504,11 @@
           <a:p>
             <a:r>
               <a:t>权衡：组合多一层对象，继承少建一棵子类树。来源是 2024 第 6-3 讲第 5–6 页。设计模式、组件和 API 都算预制品，见同讲第 2 页。</a:t>
+            </a:r>
+          </a:p>
+          <a:p>
+            <a:r>
+              <a:t>取舍：可选——时间不足时略去，不影响本课重点、后续理解与作业。</a:t>
             </a:r>
           </a:p>
         </p:txBody>
@@ -19342,112 +19372,73 @@
                 <a:ea typeface="微软雅黑"/>
                 <a:cs typeface="微软雅黑"/>
               </a:rPr>
-              <a:t>四种覆盖准则</a:t>
-            </a:r>
-          </a:p>
-        </p:txBody>
-      </p:sp>
-      <p:sp>
-        <p:nvSpPr>
-          <p:cNvPr id="8" name="review"/>
-          <p:cNvSpPr txBox="1"/>
-          <p:nvPr/>
-        </p:nvSpPr>
-        <p:spPr>
-          <a:xfrm>
-            <a:off x="411480" y="5655564"/>
-            <a:ext cx="8321040" cy="329184"/>
-          </a:xfrm>
-          <a:prstGeom prst="rect">
+              <a:t>3A 和测试方法名</a:t>
+            </a:r>
+          </a:p>
+        </p:txBody>
+      </p:sp>
+      <p:sp>
+        <p:nvSpPr>
+          <p:cNvPr id="101" name="fig-d"/>
+          <p:cNvSpPr/>
+          <p:nvPr/>
+        </p:nvSpPr>
+        <p:spPr>
+          <a:xfrm>
+            <a:off x="411480" y="1691640"/>
+            <a:ext cx="2606040" cy="640080"/>
+          </a:xfrm>
+          <a:prstGeom prst="homePlate">
             <a:avLst/>
           </a:prstGeom>
           <a:solidFill>
-            <a:srgbClr val="FBF3F2"/>
+            <a:srgbClr val="A33B38"/>
           </a:solidFill>
-          <a:ln w="9525">
+          <a:ln w="12700">
             <a:solidFill>
               <a:srgbClr val="A33B38"/>
             </a:solidFill>
           </a:ln>
         </p:spPr>
         <p:txBody>
-          <a:bodyPr wrap="square" lIns="0" rIns="0" tIns="0" bIns="0">
-            <a:noAutofit/>
-          </a:bodyPr>
-          <a:lstStyle/>
-          <a:p>
-            <a:pPr algn="ctr"/>
-            <a:r>
-              <a:rPr sz="2000">
-                <a:solidFill>
-                  <a:srgbClr val="A33B38"/>
-                </a:solidFill>
-                <a:latin typeface="微软雅黑"/>
-                <a:ea typeface="微软雅黑"/>
-              </a:rPr>
-              <a:t>回顾 E3：行与分支覆盖率只说明跑过，不说明断言写对</a:t>
-            </a:r>
-          </a:p>
-        </p:txBody>
-      </p:sp>
-      <p:sp>
-        <p:nvSpPr>
-          <p:cNvPr id="101" name="fig-d"/>
-          <p:cNvSpPr/>
-          <p:nvPr/>
-        </p:nvSpPr>
-        <p:spPr>
-          <a:xfrm>
-            <a:off x="411480" y="1691640"/>
-            <a:ext cx="2651760" cy="457200"/>
-          </a:xfrm>
-          <a:prstGeom prst="rect">
-            <a:avLst/>
-          </a:prstGeom>
-          <a:noFill/>
-          <a:ln>
-            <a:noFill/>
-          </a:ln>
-        </p:spPr>
-        <p:txBody>
-          <a:bodyPr wrap="square" lIns="18288" rIns="18288" tIns="9144" bIns="9144" anchor="ctr"/>
-          <a:lstStyle/>
-          <a:p>
-            <a:pPr algn="l">
+          <a:bodyPr wrap="square" lIns="73152" rIns="73152" tIns="36576" bIns="36576" anchor="ctr"/>
+          <a:lstStyle/>
+          <a:p>
+            <a:pPr algn="ctr">
               <a:lnSpc>
                 <a:spcPct val="100000"/>
               </a:lnSpc>
               <a:buNone/>
             </a:pPr>
             <a:r>
-              <a:rPr lang="zh-CN" altLang="en-US" sz="1600" b="0">
-                <a:solidFill>
-                  <a:srgbClr val="595959"/>
-                </a:solidFill>
-                <a:latin typeface="微软雅黑"/>
-                <a:ea typeface="微软雅黑"/>
-              </a:rPr>
-              <a:t>示意</a:t>
-            </a:r>
-            <a:endParaRPr lang="zh-CN" sz="1600">
-              <a:latin typeface="微软雅黑"/>
-              <a:ea typeface="微软雅黑"/>
-            </a:endParaRPr>
-          </a:p>
-        </p:txBody>
-      </p:sp>
-      <p:sp>
-        <p:nvSpPr>
-          <p:cNvPr id="102" name="fig-d"/>
-          <p:cNvSpPr/>
-          <p:nvPr/>
-        </p:nvSpPr>
-        <p:spPr>
-          <a:xfrm>
-            <a:off x="411480" y="2103120"/>
-            <a:ext cx="2651760" cy="1051560"/>
-          </a:xfrm>
-          <a:prstGeom prst="diamond">
+              <a:rPr lang="zh-CN" altLang="en-US" sz="2400" b="1">
+                <a:solidFill>
+                  <a:srgbClr val="FFFFFF"/>
+                </a:solidFill>
+                <a:latin typeface="微软雅黑"/>
+                <a:ea typeface="微软雅黑"/>
+              </a:rPr>
+              <a:t>Arrange</a:t>
+            </a:r>
+            <a:endParaRPr lang="zh-CN" sz="2400">
+              <a:latin typeface="微软雅黑"/>
+              <a:ea typeface="微软雅黑"/>
+            </a:endParaRPr>
+          </a:p>
+        </p:txBody>
+      </p:sp>
+      <p:sp>
+        <p:nvSpPr>
+          <p:cNvPr id="102" name="fig"/>
+          <p:cNvSpPr/>
+          <p:nvPr/>
+        </p:nvSpPr>
+        <p:spPr>
+          <a:xfrm>
+            <a:off x="411480" y="2423160"/>
+            <a:ext cx="2606040" cy="1371600"/>
+          </a:xfrm>
+          <a:prstGeom prst="roundRect">
             <a:avLst/>
           </a:prstGeom>
           <a:solidFill>
@@ -19470,16 +19461,16 @@
               <a:buNone/>
             </a:pPr>
             <a:r>
-              <a:rPr lang="zh-CN" altLang="en-US" sz="1800" b="1">
+              <a:rPr lang="zh-CN" altLang="en-US" sz="2000" b="0">
                 <a:solidFill>
                   <a:srgbClr val="262626"/>
                 </a:solidFill>
                 <a:latin typeface="微软雅黑"/>
                 <a:ea typeface="微软雅黑"/>
               </a:rPr>
-              <a:t>甲 &amp;&amp; 乙</a:t>
-            </a:r>
-            <a:endParaRPr lang="zh-CN" sz="1800">
+              <a:t>Arrange：准备输入和对象</a:t>
+            </a:r>
+            <a:endParaRPr lang="zh-CN" sz="2000">
               <a:latin typeface="微软雅黑"/>
               <a:ea typeface="微软雅黑"/>
             </a:endParaRPr>
@@ -19494,204 +19485,18 @@
         </p:nvSpPr>
         <p:spPr>
           <a:xfrm>
-            <a:off x="822960" y="2926080"/>
-            <a:ext cx="9144" cy="685800"/>
-          </a:xfrm>
-          <a:custGeom>
-            <a:avLst/>
-            <a:gdLst/>
-            <a:ahLst/>
-            <a:cxnLst/>
-            <a:rect l="0" t="0" r="r" b="b"/>
-            <a:pathLst>
-              <a:path w="9144" h="685800" fill="none">
-                <a:moveTo>
-                  <a:pt x="0" y="0"/>
-                </a:moveTo>
-                <a:lnTo>
-                  <a:pt x="0" y="685800"/>
-                </a:lnTo>
-              </a:path>
-            </a:pathLst>
-          </a:custGeom>
-          <a:noFill/>
-          <a:ln w="22225">
-            <a:solidFill>
-              <a:srgbClr val="595959"/>
-            </a:solidFill>
-            <a:tailEnd type="triangle" w="med" len="med"/>
-          </a:ln>
-        </p:spPr>
-        <p:txBody>
-          <a:bodyPr/>
-          <a:lstStyle/>
-          <a:p>
-            <a:endParaRPr lang="zh-CN">
-              <a:latin typeface="微软雅黑"/>
-              <a:ea typeface="微软雅黑"/>
-            </a:endParaRPr>
-          </a:p>
-        </p:txBody>
-      </p:sp>
-      <p:sp>
-        <p:nvSpPr>
-          <p:cNvPr id="104" name="fig-d"/>
-          <p:cNvSpPr/>
-          <p:nvPr/>
-        </p:nvSpPr>
-        <p:spPr>
-          <a:xfrm>
-            <a:off x="2651760" y="2926080"/>
-            <a:ext cx="9144" cy="685800"/>
-          </a:xfrm>
-          <a:custGeom>
-            <a:avLst/>
-            <a:gdLst/>
-            <a:ahLst/>
-            <a:cxnLst/>
-            <a:rect l="0" t="0" r="r" b="b"/>
-            <a:pathLst>
-              <a:path w="9144" h="685800" fill="none">
-                <a:moveTo>
-                  <a:pt x="0" y="0"/>
-                </a:moveTo>
-                <a:lnTo>
-                  <a:pt x="0" y="685800"/>
-                </a:lnTo>
-              </a:path>
-            </a:pathLst>
-          </a:custGeom>
-          <a:noFill/>
-          <a:ln w="22225">
-            <a:solidFill>
-              <a:srgbClr val="595959"/>
-            </a:solidFill>
-            <a:tailEnd type="triangle" w="med" len="med"/>
-          </a:ln>
-        </p:spPr>
-        <p:txBody>
-          <a:bodyPr/>
-          <a:lstStyle/>
-          <a:p>
-            <a:endParaRPr lang="zh-CN">
-              <a:latin typeface="微软雅黑"/>
-              <a:ea typeface="微软雅黑"/>
-            </a:endParaRPr>
-          </a:p>
-        </p:txBody>
-      </p:sp>
-      <p:sp>
-        <p:nvSpPr>
-          <p:cNvPr id="105" name="fig-d"/>
-          <p:cNvSpPr/>
-          <p:nvPr/>
-        </p:nvSpPr>
-        <p:spPr>
-          <a:xfrm>
-            <a:off x="896112" y="3108960"/>
-            <a:ext cx="548640" cy="292608"/>
-          </a:xfrm>
-          <a:prstGeom prst="rect">
-            <a:avLst/>
-          </a:prstGeom>
-          <a:noFill/>
-          <a:ln>
-            <a:noFill/>
-          </a:ln>
-        </p:spPr>
-        <p:txBody>
-          <a:bodyPr wrap="square" lIns="18288" rIns="18288" tIns="9144" bIns="9144" anchor="ctr"/>
-          <a:lstStyle/>
-          <a:p>
-            <a:pPr algn="l">
-              <a:lnSpc>
-                <a:spcPct val="100000"/>
-              </a:lnSpc>
-              <a:buNone/>
-            </a:pPr>
-            <a:r>
-              <a:rPr lang="zh-CN" altLang="en-US" sz="1600" b="1">
-                <a:solidFill>
-                  <a:srgbClr val="A33B38"/>
-                </a:solidFill>
-                <a:latin typeface="微软雅黑"/>
-                <a:ea typeface="微软雅黑"/>
-              </a:rPr>
-              <a:t>真</a:t>
-            </a:r>
-            <a:endParaRPr lang="zh-CN" sz="1600">
-              <a:latin typeface="微软雅黑"/>
-              <a:ea typeface="微软雅黑"/>
-            </a:endParaRPr>
-          </a:p>
-        </p:txBody>
-      </p:sp>
-      <p:sp>
-        <p:nvSpPr>
-          <p:cNvPr id="106" name="fig-d"/>
-          <p:cNvSpPr/>
-          <p:nvPr/>
-        </p:nvSpPr>
-        <p:spPr>
-          <a:xfrm>
-            <a:off x="2724912" y="3273552"/>
-            <a:ext cx="548640" cy="292608"/>
-          </a:xfrm>
-          <a:prstGeom prst="rect">
-            <a:avLst/>
-          </a:prstGeom>
-          <a:noFill/>
-          <a:ln>
-            <a:noFill/>
-          </a:ln>
-        </p:spPr>
-        <p:txBody>
-          <a:bodyPr wrap="square" lIns="18288" rIns="18288" tIns="9144" bIns="9144" anchor="ctr"/>
-          <a:lstStyle/>
-          <a:p>
-            <a:pPr algn="l">
-              <a:lnSpc>
-                <a:spcPct val="100000"/>
-              </a:lnSpc>
-              <a:buNone/>
-            </a:pPr>
-            <a:r>
-              <a:rPr lang="zh-CN" altLang="en-US" sz="1600" b="1">
-                <a:solidFill>
-                  <a:srgbClr val="A33B38"/>
-                </a:solidFill>
-                <a:latin typeface="微软雅黑"/>
-                <a:ea typeface="微软雅黑"/>
-              </a:rPr>
-              <a:t>假</a:t>
-            </a:r>
-            <a:endParaRPr lang="zh-CN" sz="1600">
-              <a:latin typeface="微软雅黑"/>
-              <a:ea typeface="微软雅黑"/>
-            </a:endParaRPr>
-          </a:p>
-        </p:txBody>
-      </p:sp>
-      <p:sp>
-        <p:nvSpPr>
-          <p:cNvPr id="107" name="fig-d"/>
-          <p:cNvSpPr/>
-          <p:nvPr/>
-        </p:nvSpPr>
-        <p:spPr>
-          <a:xfrm>
-            <a:off x="411480" y="3611880"/>
-            <a:ext cx="868680" cy="411480"/>
-          </a:xfrm>
-          <a:prstGeom prst="rect">
+            <a:off x="3246120" y="1691640"/>
+            <a:ext cx="2606040" cy="640080"/>
+          </a:xfrm>
+          <a:prstGeom prst="homePlate">
             <a:avLst/>
           </a:prstGeom>
           <a:solidFill>
-            <a:srgbClr val="FFFFFF"/>
+            <a:srgbClr val="A33B38"/>
           </a:solidFill>
           <a:ln w="12700">
             <a:solidFill>
-              <a:srgbClr val="A6A6A6"/>
+              <a:srgbClr val="A33B38"/>
             </a:solidFill>
           </a:ln>
         </p:spPr>
@@ -19706,84 +19511,34 @@
               <a:buNone/>
             </a:pPr>
             <a:r>
-              <a:rPr lang="zh-CN" altLang="en-US" sz="1600" b="0">
-                <a:solidFill>
-                  <a:srgbClr val="262626"/>
-                </a:solidFill>
-                <a:latin typeface="微软雅黑"/>
-                <a:ea typeface="微软雅黑"/>
-              </a:rPr>
-              <a:t>通过</a:t>
-            </a:r>
-            <a:endParaRPr lang="zh-CN" sz="1600">
-              <a:latin typeface="微软雅黑"/>
-              <a:ea typeface="微软雅黑"/>
-            </a:endParaRPr>
-          </a:p>
-        </p:txBody>
-      </p:sp>
-      <p:sp>
-        <p:nvSpPr>
-          <p:cNvPr id="108" name="fig-d"/>
-          <p:cNvSpPr/>
-          <p:nvPr/>
-        </p:nvSpPr>
-        <p:spPr>
-          <a:xfrm>
-            <a:off x="2194560" y="3611880"/>
-            <a:ext cx="868680" cy="411480"/>
-          </a:xfrm>
-          <a:prstGeom prst="rect">
-            <a:avLst/>
-          </a:prstGeom>
-          <a:solidFill>
-            <a:srgbClr val="FFFFFF"/>
-          </a:solidFill>
-          <a:ln w="12700">
-            <a:solidFill>
-              <a:srgbClr val="A6A6A6"/>
-            </a:solidFill>
-          </a:ln>
-        </p:spPr>
-        <p:txBody>
-          <a:bodyPr wrap="square" lIns="73152" rIns="73152" tIns="36576" bIns="36576" anchor="ctr"/>
-          <a:lstStyle/>
-          <a:p>
-            <a:pPr algn="ctr">
-              <a:lnSpc>
-                <a:spcPct val="100000"/>
-              </a:lnSpc>
-              <a:buNone/>
-            </a:pPr>
-            <a:r>
-              <a:rPr lang="zh-CN" altLang="en-US" sz="1600" b="0">
-                <a:solidFill>
-                  <a:srgbClr val="262626"/>
-                </a:solidFill>
-                <a:latin typeface="微软雅黑"/>
-                <a:ea typeface="微软雅黑"/>
-              </a:rPr>
-              <a:t>拒绝</a:t>
-            </a:r>
-            <a:endParaRPr lang="zh-CN" sz="1600">
-              <a:latin typeface="微软雅黑"/>
-              <a:ea typeface="微软雅黑"/>
-            </a:endParaRPr>
-          </a:p>
-        </p:txBody>
-      </p:sp>
-      <p:sp>
-        <p:nvSpPr>
-          <p:cNvPr id="109" name="fig"/>
-          <p:cNvSpPr/>
-          <p:nvPr/>
-        </p:nvSpPr>
-        <p:spPr>
-          <a:xfrm>
-            <a:off x="3383280" y="1645920"/>
-            <a:ext cx="5349240" cy="548640"/>
-          </a:xfrm>
-          <a:prstGeom prst="rect">
+              <a:rPr lang="zh-CN" altLang="en-US" sz="2400" b="1">
+                <a:solidFill>
+                  <a:srgbClr val="FFFFFF"/>
+                </a:solidFill>
+                <a:latin typeface="微软雅黑"/>
+                <a:ea typeface="微软雅黑"/>
+              </a:rPr>
+              <a:t>Act</a:t>
+            </a:r>
+            <a:endParaRPr lang="zh-CN" sz="2400">
+              <a:latin typeface="微软雅黑"/>
+              <a:ea typeface="微软雅黑"/>
+            </a:endParaRPr>
+          </a:p>
+        </p:txBody>
+      </p:sp>
+      <p:sp>
+        <p:nvSpPr>
+          <p:cNvPr id="104" name="fig"/>
+          <p:cNvSpPr/>
+          <p:nvPr/>
+        </p:nvSpPr>
+        <p:spPr>
+          <a:xfrm>
+            <a:off x="3246120" y="2423160"/>
+            <a:ext cx="2606040" cy="1371600"/>
+          </a:xfrm>
+          <a:prstGeom prst="roundRect">
             <a:avLst/>
           </a:prstGeom>
           <a:solidFill>
@@ -19799,7 +19554,7 @@
           <a:bodyPr wrap="square" lIns="73152" rIns="73152" tIns="36576" bIns="36576" anchor="ctr"/>
           <a:lstStyle/>
           <a:p>
-            <a:pPr algn="l">
+            <a:pPr algn="ctr">
               <a:lnSpc>
                 <a:spcPct val="100000"/>
               </a:lnSpc>
@@ -19813,7 +19568,7 @@
                 <a:latin typeface="微软雅黑"/>
                 <a:ea typeface="微软雅黑"/>
               </a:rPr>
-              <a:t>行覆盖：哪些行执行过</a:t>
+              <a:t>Act：调用被测行为</a:t>
             </a:r>
             <a:endParaRPr lang="zh-CN" sz="2000">
               <a:latin typeface="微软雅黑"/>
@@ -19824,16 +19579,66 @@
       </p:sp>
       <p:sp>
         <p:nvSpPr>
-          <p:cNvPr id="110" name="fig"/>
-          <p:cNvSpPr/>
-          <p:nvPr/>
-        </p:nvSpPr>
-        <p:spPr>
-          <a:xfrm>
-            <a:off x="3383280" y="2286000"/>
-            <a:ext cx="5349240" cy="548640"/>
+          <p:cNvPr id="105" name="fig-d"/>
+          <p:cNvSpPr/>
+          <p:nvPr/>
+        </p:nvSpPr>
+        <p:spPr>
+          <a:xfrm>
+            <a:off x="6080760" y="1691640"/>
+            <a:ext cx="2606040" cy="640080"/>
           </a:xfrm>
           <a:prstGeom prst="rect">
+            <a:avLst/>
+          </a:prstGeom>
+          <a:solidFill>
+            <a:srgbClr val="A33B38"/>
+          </a:solidFill>
+          <a:ln w="12700">
+            <a:solidFill>
+              <a:srgbClr val="A33B38"/>
+            </a:solidFill>
+          </a:ln>
+        </p:spPr>
+        <p:txBody>
+          <a:bodyPr wrap="square" lIns="73152" rIns="73152" tIns="36576" bIns="36576" anchor="ctr"/>
+          <a:lstStyle/>
+          <a:p>
+            <a:pPr algn="ctr">
+              <a:lnSpc>
+                <a:spcPct val="100000"/>
+              </a:lnSpc>
+              <a:buNone/>
+            </a:pPr>
+            <a:r>
+              <a:rPr lang="zh-CN" altLang="en-US" sz="2400" b="1">
+                <a:solidFill>
+                  <a:srgbClr val="FFFFFF"/>
+                </a:solidFill>
+                <a:latin typeface="微软雅黑"/>
+                <a:ea typeface="微软雅黑"/>
+              </a:rPr>
+              <a:t>Assert</a:t>
+            </a:r>
+            <a:endParaRPr lang="zh-CN" sz="2400">
+              <a:latin typeface="微软雅黑"/>
+              <a:ea typeface="微软雅黑"/>
+            </a:endParaRPr>
+          </a:p>
+        </p:txBody>
+      </p:sp>
+      <p:sp>
+        <p:nvSpPr>
+          <p:cNvPr id="106" name="fig"/>
+          <p:cNvSpPr/>
+          <p:nvPr/>
+        </p:nvSpPr>
+        <p:spPr>
+          <a:xfrm>
+            <a:off x="6080760" y="2423160"/>
+            <a:ext cx="2606040" cy="1371600"/>
+          </a:xfrm>
+          <a:prstGeom prst="roundRect">
             <a:avLst/>
           </a:prstGeom>
           <a:solidFill>
@@ -19849,7 +19654,7 @@
           <a:bodyPr wrap="square" lIns="73152" rIns="73152" tIns="36576" bIns="36576" anchor="ctr"/>
           <a:lstStyle/>
           <a:p>
-            <a:pPr algn="l">
+            <a:pPr algn="ctr">
               <a:lnSpc>
                 <a:spcPct val="100000"/>
               </a:lnSpc>
@@ -19863,7 +19668,7 @@
                 <a:latin typeface="微软雅黑"/>
                 <a:ea typeface="微软雅黑"/>
               </a:rPr>
-              <a:t>判定覆盖：判定的真假是否都出现</a:t>
+              <a:t>Assert：比较实际与期望</a:t>
             </a:r>
             <a:endParaRPr lang="zh-CN" sz="2000">
               <a:latin typeface="微软雅黑"/>
@@ -19874,22 +19679,22 @@
       </p:sp>
       <p:sp>
         <p:nvSpPr>
-          <p:cNvPr id="111" name="fig"/>
-          <p:cNvSpPr/>
-          <p:nvPr/>
-        </p:nvSpPr>
-        <p:spPr>
-          <a:xfrm>
-            <a:off x="3383280" y="2926080"/>
-            <a:ext cx="5349240" cy="548640"/>
+          <p:cNvPr id="107" name="fig"/>
+          <p:cNvSpPr/>
+          <p:nvPr/>
+        </p:nvSpPr>
+        <p:spPr>
+          <a:xfrm>
+            <a:off x="411480" y="4114800"/>
+            <a:ext cx="8321040" cy="868680"/>
           </a:xfrm>
           <a:prstGeom prst="rect">
             <a:avLst/>
           </a:prstGeom>
           <a:solidFill>
-            <a:srgbClr val="F6E8E6"/>
+            <a:srgbClr val="FFFFFF"/>
           </a:solidFill>
-          <a:ln w="12700">
+          <a:ln w="28575">
             <a:solidFill>
               <a:srgbClr val="A33B38"/>
             </a:solidFill>
@@ -19899,130 +19704,32 @@
           <a:bodyPr wrap="square" lIns="73152" rIns="73152" tIns="36576" bIns="36576" anchor="ctr"/>
           <a:lstStyle/>
           <a:p>
-            <a:pPr algn="l">
+            <a:pPr algn="ctr">
               <a:lnSpc>
                 <a:spcPct val="100000"/>
               </a:lnSpc>
               <a:buNone/>
             </a:pPr>
             <a:r>
-              <a:rPr lang="zh-CN" altLang="en-US" sz="2000" b="0">
-                <a:solidFill>
-                  <a:srgbClr val="262626"/>
-                </a:solidFill>
-                <a:latin typeface="微软雅黑"/>
-                <a:ea typeface="微软雅黑"/>
-              </a:rPr>
-              <a:t>条件覆盖：每个条件的真假是否都出现</a:t>
-            </a:r>
-            <a:endParaRPr lang="zh-CN" sz="2000">
-              <a:latin typeface="微软雅黑"/>
-              <a:ea typeface="微软雅黑"/>
-            </a:endParaRPr>
-          </a:p>
-        </p:txBody>
-      </p:sp>
-      <p:sp>
-        <p:nvSpPr>
-          <p:cNvPr id="112" name="fig"/>
-          <p:cNvSpPr/>
-          <p:nvPr/>
-        </p:nvSpPr>
-        <p:spPr>
-          <a:xfrm>
-            <a:off x="3383280" y="3566160"/>
-            <a:ext cx="5349240" cy="868680"/>
-          </a:xfrm>
-          <a:prstGeom prst="rect">
-            <a:avLst/>
-          </a:prstGeom>
-          <a:solidFill>
-            <a:srgbClr val="F6E8E6"/>
-          </a:solidFill>
-          <a:ln w="12700">
-            <a:solidFill>
-              <a:srgbClr val="A33B38"/>
-            </a:solidFill>
-          </a:ln>
-        </p:spPr>
-        <p:txBody>
-          <a:bodyPr wrap="square" lIns="73152" rIns="73152" tIns="36576" bIns="36576" anchor="ctr"/>
-          <a:lstStyle/>
-          <a:p>
-            <a:pPr algn="l">
-              <a:lnSpc>
-                <a:spcPct val="100000"/>
-              </a:lnSpc>
-              <a:buNone/>
-            </a:pPr>
-            <a:r>
-              <a:rPr lang="zh-CN" altLang="en-US" sz="2000" b="0">
-                <a:solidFill>
-                  <a:srgbClr val="262626"/>
-                </a:solidFill>
-                <a:latin typeface="微软雅黑"/>
-                <a:ea typeface="微软雅黑"/>
-              </a:rPr>
-              <a:t>MC/DC：每个基本条件都能在其他条件保持不变时，独立改变整个判定结果</a:t>
-            </a:r>
-            <a:endParaRPr lang="zh-CN" sz="2000">
-              <a:latin typeface="微软雅黑"/>
-              <a:ea typeface="微软雅黑"/>
-            </a:endParaRPr>
-          </a:p>
-        </p:txBody>
-      </p:sp>
-      <p:sp>
-        <p:nvSpPr>
-          <p:cNvPr id="113" name="fig"/>
-          <p:cNvSpPr/>
-          <p:nvPr/>
-        </p:nvSpPr>
-        <p:spPr>
-          <a:xfrm>
-            <a:off x="411480" y="4709160"/>
-            <a:ext cx="8321040" cy="548640"/>
-          </a:xfrm>
-          <a:prstGeom prst="rect">
-            <a:avLst/>
-          </a:prstGeom>
-          <a:solidFill>
-            <a:srgbClr val="F5F5F5"/>
-          </a:solidFill>
-          <a:ln>
-            <a:noFill/>
-          </a:ln>
-        </p:spPr>
-        <p:txBody>
-          <a:bodyPr wrap="square" lIns="73152" rIns="73152" tIns="36576" bIns="36576" anchor="ctr"/>
-          <a:lstStyle/>
-          <a:p>
-            <a:pPr algn="l">
-              <a:lnSpc>
-                <a:spcPct val="100000"/>
-              </a:lnSpc>
-              <a:buNone/>
-            </a:pPr>
-            <a:r>
-              <a:rPr lang="zh-CN" altLang="en-US" sz="2000" b="0">
-                <a:solidFill>
-                  <a:srgbClr val="595959"/>
-                </a:solidFill>
-                <a:latin typeface="微软雅黑"/>
-                <a:ea typeface="微软雅黑"/>
-              </a:rPr>
-              <a:t>课程 JaCoCo 不给 MC/DC</a:t>
-            </a:r>
-            <a:endParaRPr lang="zh-CN" sz="2000">
-              <a:latin typeface="微软雅黑"/>
-              <a:ea typeface="微软雅黑"/>
-            </a:endParaRPr>
-          </a:p>
-        </p:txBody>
-      </p:sp>
-      <p:sp>
-        <p:nvSpPr>
-          <p:cNvPr id="114" name="sec-label"/>
+              <a:rPr lang="zh-CN" altLang="en-US" sz="2400" b="1">
+                <a:solidFill>
+                  <a:srgbClr val="A33B38"/>
+                </a:solidFill>
+                <a:latin typeface="微软雅黑"/>
+                <a:ea typeface="微软雅黑"/>
+              </a:rPr>
+              <a:t>方法名写下对象、输入和期望</a:t>
+            </a:r>
+            <a:endParaRPr lang="zh-CN" sz="2400">
+              <a:latin typeface="微软雅黑"/>
+              <a:ea typeface="微软雅黑"/>
+            </a:endParaRPr>
+          </a:p>
+        </p:txBody>
+      </p:sp>
+      <p:sp>
+        <p:nvSpPr>
+          <p:cNvPr id="108" name="sec-label"/>
           <p:cNvSpPr txBox="1"/>
           <p:nvPr/>
         </p:nvSpPr>
@@ -20064,844 +19771,6 @@
 </file>
 
 <file path=ppt/slides/slide26.xml><?xml version="1.0" encoding="utf-8"?>
-<p:sld xmlns:a="http://schemas.openxmlformats.org/drawingml/2006/main" xmlns:p="http://schemas.openxmlformats.org/presentationml/2006/main" xmlns:r="http://schemas.openxmlformats.org/officeDocument/2006/relationships">
-  <p:cSld>
-    <p:spTree>
-      <p:nvGrpSpPr>
-        <p:cNvPr id="1" name=""/>
-        <p:cNvGrpSpPr/>
-        <p:nvPr/>
-      </p:nvGrpSpPr>
-      <p:grpSpPr/>
-      <p:sp>
-        <p:nvSpPr>
-          <p:cNvPr id="2" name="Title 1"/>
-          <p:cNvSpPr>
-            <a:spLocks noGrp="1"/>
-          </p:cNvSpPr>
-          <p:nvPr>
-            <p:ph type="title"/>
-          </p:nvPr>
-        </p:nvSpPr>
-        <p:spPr/>
-        <p:txBody>
-          <a:bodyPr wrap="square" lIns="54864" rIns="54864" tIns="18288" bIns="18288" eaLnBrk="1" hangingPunct="1" latinLnBrk="0"/>
-          <a:lstStyle/>
-          <a:p>
-            <a:pPr algn="l" eaLnBrk="1" hangingPunct="1">
-              <a:lnSpc>
-                <a:spcPct val="100000"/>
-              </a:lnSpc>
-              <a:spcBef>
-                <a:spcPts val="600"/>
-              </a:spcBef>
-              <a:spcAft>
-                <a:spcPts val="200"/>
-              </a:spcAft>
-              <a:buNone/>
-            </a:pPr>
-            <a:r>
-              <a:rPr sz="2800" b="1" lang="zh-CN" altLang="en-US">
-                <a:solidFill>
-                  <a:srgbClr val="A33B38"/>
-                </a:solidFill>
-                <a:latin typeface="微软雅黑"/>
-                <a:ea typeface="微软雅黑"/>
-                <a:cs typeface="微软雅黑"/>
-              </a:rPr>
-              <a:t>覆盖证明不了的事</a:t>
-            </a:r>
-          </a:p>
-        </p:txBody>
-      </p:sp>
-      <p:sp>
-        <p:nvSpPr>
-          <p:cNvPr id="101" name="fig-d"/>
-          <p:cNvSpPr/>
-          <p:nvPr/>
-        </p:nvSpPr>
-        <p:spPr>
-          <a:xfrm>
-            <a:off x="411480" y="1645920"/>
-            <a:ext cx="4069080" cy="502920"/>
-          </a:xfrm>
-          <a:prstGeom prst="rect">
-            <a:avLst/>
-          </a:prstGeom>
-          <a:solidFill>
-            <a:srgbClr val="595959"/>
-          </a:solidFill>
-          <a:ln w="12700">
-            <a:solidFill>
-              <a:srgbClr val="595959"/>
-            </a:solidFill>
-          </a:ln>
-        </p:spPr>
-        <p:txBody>
-          <a:bodyPr wrap="square" lIns="73152" rIns="73152" tIns="36576" bIns="36576" anchor="ctr"/>
-          <a:lstStyle/>
-          <a:p>
-            <a:pPr algn="ctr">
-              <a:lnSpc>
-                <a:spcPct val="100000"/>
-              </a:lnSpc>
-              <a:buNone/>
-            </a:pPr>
-            <a:r>
-              <a:rPr lang="zh-CN" altLang="en-US" sz="2000" b="1">
-                <a:solidFill>
-                  <a:srgbClr val="FFFFFF"/>
-                </a:solidFill>
-                <a:latin typeface="微软雅黑"/>
-                <a:ea typeface="微软雅黑"/>
-              </a:rPr>
-              <a:t>能说明</a:t>
-            </a:r>
-            <a:endParaRPr lang="zh-CN" sz="2000">
-              <a:latin typeface="微软雅黑"/>
-              <a:ea typeface="微软雅黑"/>
-            </a:endParaRPr>
-          </a:p>
-        </p:txBody>
-      </p:sp>
-      <p:sp>
-        <p:nvSpPr>
-          <p:cNvPr id="102" name="fig-d"/>
-          <p:cNvSpPr/>
-          <p:nvPr/>
-        </p:nvSpPr>
-        <p:spPr>
-          <a:xfrm>
-            <a:off x="4663440" y="1645920"/>
-            <a:ext cx="4069080" cy="502920"/>
-          </a:xfrm>
-          <a:prstGeom prst="rect">
-            <a:avLst/>
-          </a:prstGeom>
-          <a:solidFill>
-            <a:srgbClr val="A33B38"/>
-          </a:solidFill>
-          <a:ln w="12700">
-            <a:solidFill>
-              <a:srgbClr val="A33B38"/>
-            </a:solidFill>
-          </a:ln>
-        </p:spPr>
-        <p:txBody>
-          <a:bodyPr wrap="square" lIns="73152" rIns="73152" tIns="36576" bIns="36576" anchor="ctr"/>
-          <a:lstStyle/>
-          <a:p>
-            <a:pPr algn="ctr">
-              <a:lnSpc>
-                <a:spcPct val="100000"/>
-              </a:lnSpc>
-              <a:buNone/>
-            </a:pPr>
-            <a:r>
-              <a:rPr lang="zh-CN" altLang="en-US" sz="2000" b="1">
-                <a:solidFill>
-                  <a:srgbClr val="FFFFFF"/>
-                </a:solidFill>
-                <a:latin typeface="微软雅黑"/>
-                <a:ea typeface="微软雅黑"/>
-              </a:rPr>
-              <a:t>不能说明</a:t>
-            </a:r>
-            <a:endParaRPr lang="zh-CN" sz="2000">
-              <a:latin typeface="微软雅黑"/>
-              <a:ea typeface="微软雅黑"/>
-            </a:endParaRPr>
-          </a:p>
-        </p:txBody>
-      </p:sp>
-      <p:sp>
-        <p:nvSpPr>
-          <p:cNvPr id="103" name="fig"/>
-          <p:cNvSpPr/>
-          <p:nvPr/>
-        </p:nvSpPr>
-        <p:spPr>
-          <a:xfrm>
-            <a:off x="411480" y="2240280"/>
-            <a:ext cx="4069080" cy="1965960"/>
-          </a:xfrm>
-          <a:prstGeom prst="roundRect">
-            <a:avLst/>
-          </a:prstGeom>
-          <a:solidFill>
-            <a:srgbClr val="F5F5F5"/>
-          </a:solidFill>
-          <a:ln w="12700">
-            <a:solidFill>
-              <a:srgbClr val="A6A6A6"/>
-            </a:solidFill>
-          </a:ln>
-        </p:spPr>
-        <p:txBody>
-          <a:bodyPr wrap="square" lIns="73152" rIns="73152" tIns="36576" bIns="36576" anchor="ctr"/>
-          <a:lstStyle/>
-          <a:p>
-            <a:pPr algn="ctr">
-              <a:lnSpc>
-                <a:spcPct val="100000"/>
-              </a:lnSpc>
-              <a:buNone/>
-            </a:pPr>
-            <a:r>
-              <a:rPr lang="zh-CN" altLang="en-US" sz="2200" b="0">
-                <a:solidFill>
-                  <a:srgbClr val="262626"/>
-                </a:solidFill>
-                <a:latin typeface="微软雅黑"/>
-                <a:ea typeface="微软雅黑"/>
-              </a:rPr>
-              <a:t>它说明这些行或分支跑过</a:t>
-            </a:r>
-            <a:endParaRPr lang="zh-CN" sz="2200">
-              <a:latin typeface="微软雅黑"/>
-              <a:ea typeface="微软雅黑"/>
-            </a:endParaRPr>
-          </a:p>
-        </p:txBody>
-      </p:sp>
-      <p:sp>
-        <p:nvSpPr>
-          <p:cNvPr id="104" name="fig"/>
-          <p:cNvSpPr/>
-          <p:nvPr/>
-        </p:nvSpPr>
-        <p:spPr>
-          <a:xfrm>
-            <a:off x="4663440" y="2240280"/>
-            <a:ext cx="4069080" cy="914400"/>
-          </a:xfrm>
-          <a:prstGeom prst="roundRect">
-            <a:avLst/>
-          </a:prstGeom>
-          <a:solidFill>
-            <a:srgbClr val="F6E8E6"/>
-          </a:solidFill>
-          <a:ln w="12700">
-            <a:solidFill>
-              <a:srgbClr val="A33B38"/>
-            </a:solidFill>
-          </a:ln>
-        </p:spPr>
-        <p:txBody>
-          <a:bodyPr wrap="square" lIns="73152" rIns="73152" tIns="36576" bIns="36576" anchor="ctr"/>
-          <a:lstStyle/>
-          <a:p>
-            <a:pPr algn="ctr">
-              <a:lnSpc>
-                <a:spcPct val="100000"/>
-              </a:lnSpc>
-              <a:buNone/>
-            </a:pPr>
-            <a:r>
-              <a:rPr lang="zh-CN" altLang="en-US" sz="2000" b="0">
-                <a:solidFill>
-                  <a:srgbClr val="262626"/>
-                </a:solidFill>
-                <a:latin typeface="微软雅黑"/>
-                <a:ea typeface="微软雅黑"/>
-              </a:rPr>
-              <a:t>它不说明断言写对了业务</a:t>
-            </a:r>
-            <a:endParaRPr lang="zh-CN" sz="2000">
-              <a:latin typeface="微软雅黑"/>
-              <a:ea typeface="微软雅黑"/>
-            </a:endParaRPr>
-          </a:p>
-        </p:txBody>
-      </p:sp>
-      <p:sp>
-        <p:nvSpPr>
-          <p:cNvPr id="105" name="fig"/>
-          <p:cNvSpPr/>
-          <p:nvPr/>
-        </p:nvSpPr>
-        <p:spPr>
-          <a:xfrm>
-            <a:off x="4663440" y="3291840"/>
-            <a:ext cx="4069080" cy="914400"/>
-          </a:xfrm>
-          <a:prstGeom prst="roundRect">
-            <a:avLst/>
-          </a:prstGeom>
-          <a:solidFill>
-            <a:srgbClr val="F6E8E6"/>
-          </a:solidFill>
-          <a:ln w="12700">
-            <a:solidFill>
-              <a:srgbClr val="A33B38"/>
-            </a:solidFill>
-          </a:ln>
-        </p:spPr>
-        <p:txBody>
-          <a:bodyPr wrap="square" lIns="73152" rIns="73152" tIns="36576" bIns="36576" anchor="ctr"/>
-          <a:lstStyle/>
-          <a:p>
-            <a:pPr algn="ctr">
-              <a:lnSpc>
-                <a:spcPct val="100000"/>
-              </a:lnSpc>
-              <a:buNone/>
-            </a:pPr>
-            <a:r>
-              <a:rPr lang="zh-CN" altLang="en-US" sz="2000" b="0">
-                <a:solidFill>
-                  <a:srgbClr val="262626"/>
-                </a:solidFill>
-                <a:latin typeface="微软雅黑"/>
-                <a:ea typeface="微软雅黑"/>
-              </a:rPr>
-              <a:t>没跑到的失败方式仍然可能存在</a:t>
-            </a:r>
-            <a:endParaRPr lang="zh-CN" sz="2000">
-              <a:latin typeface="微软雅黑"/>
-              <a:ea typeface="微软雅黑"/>
-            </a:endParaRPr>
-          </a:p>
-        </p:txBody>
-      </p:sp>
-      <p:sp>
-        <p:nvSpPr>
-          <p:cNvPr id="106" name="fig"/>
-          <p:cNvSpPr/>
-          <p:nvPr/>
-        </p:nvSpPr>
-        <p:spPr>
-          <a:xfrm>
-            <a:off x="411480" y="4434840"/>
-            <a:ext cx="8321040" cy="868680"/>
-          </a:xfrm>
-          <a:prstGeom prst="rect">
-            <a:avLst/>
-          </a:prstGeom>
-          <a:solidFill>
-            <a:srgbClr val="A33B38"/>
-          </a:solidFill>
-          <a:ln w="12700">
-            <a:solidFill>
-              <a:srgbClr val="A33B38"/>
-            </a:solidFill>
-          </a:ln>
-        </p:spPr>
-        <p:txBody>
-          <a:bodyPr wrap="square" lIns="73152" rIns="73152" tIns="36576" bIns="36576" anchor="ctr"/>
-          <a:lstStyle/>
-          <a:p>
-            <a:pPr algn="ctr">
-              <a:lnSpc>
-                <a:spcPct val="100000"/>
-              </a:lnSpc>
-              <a:buNone/>
-            </a:pPr>
-            <a:r>
-              <a:rPr lang="zh-CN" altLang="en-US" sz="2600" b="1">
-                <a:solidFill>
-                  <a:srgbClr val="FFFFFF"/>
-                </a:solidFill>
-                <a:latin typeface="微软雅黑"/>
-                <a:ea typeface="微软雅黑"/>
-              </a:rPr>
-              <a:t>绿灯还要看期望从哪来</a:t>
-            </a:r>
-            <a:endParaRPr lang="zh-CN" sz="2600">
-              <a:latin typeface="微软雅黑"/>
-              <a:ea typeface="微软雅黑"/>
-            </a:endParaRPr>
-          </a:p>
-        </p:txBody>
-      </p:sp>
-      <p:sp>
-        <p:nvSpPr>
-          <p:cNvPr id="107" name="sec-label"/>
-          <p:cNvSpPr txBox="1"/>
-          <p:nvPr/>
-        </p:nvSpPr>
-        <p:spPr>
-          <a:xfrm>
-            <a:off x="576072" y="36576"/>
-            <a:ext cx="8001000" cy="246888"/>
-          </a:xfrm>
-          <a:prstGeom prst="rect">
-            <a:avLst/>
-          </a:prstGeom>
-          <a:noFill/>
-        </p:spPr>
-        <p:txBody>
-          <a:bodyPr wrap="square" lIns="91440" rIns="91440" tIns="0" bIns="0" anchor="b"/>
-          <a:lstStyle/>
-          <a:p>
-            <a:pPr algn="l"/>
-            <a:r>
-              <a:rPr lang="zh-CN" altLang="en-US" sz="1200" b="0">
-                <a:solidFill>
-                  <a:srgbClr val="595959"/>
-                </a:solidFill>
-                <a:latin typeface="微软雅黑"/>
-                <a:ea typeface="微软雅黑"/>
-              </a:rPr>
-              <a:t>测试的基本要求</a:t>
-            </a:r>
-          </a:p>
-        </p:txBody>
-      </p:sp>
-    </p:spTree>
-  </p:cSld>
-  <p:clrMapOvr>
-    <a:masterClrMapping/>
-  </p:clrMapOvr>
-  <p:hf sldNum="0" hdr="0" ftr="0" dt="0"/>
-</p:sld>
-</file>
-
-<file path=ppt/slides/slide27.xml><?xml version="1.0" encoding="utf-8"?>
-<p:sld xmlns:a="http://schemas.openxmlformats.org/drawingml/2006/main" xmlns:p="http://schemas.openxmlformats.org/presentationml/2006/main" xmlns:r="http://schemas.openxmlformats.org/officeDocument/2006/relationships">
-  <p:cSld>
-    <p:spTree>
-      <p:nvGrpSpPr>
-        <p:cNvPr id="1" name=""/>
-        <p:cNvGrpSpPr/>
-        <p:nvPr/>
-      </p:nvGrpSpPr>
-      <p:grpSpPr/>
-      <p:sp>
-        <p:nvSpPr>
-          <p:cNvPr id="2" name="Title 1"/>
-          <p:cNvSpPr>
-            <a:spLocks noGrp="1"/>
-          </p:cNvSpPr>
-          <p:nvPr>
-            <p:ph type="title"/>
-          </p:nvPr>
-        </p:nvSpPr>
-        <p:spPr/>
-        <p:txBody>
-          <a:bodyPr wrap="square" lIns="54864" rIns="54864" tIns="18288" bIns="18288" eaLnBrk="1" hangingPunct="1" latinLnBrk="0"/>
-          <a:lstStyle/>
-          <a:p>
-            <a:pPr algn="l" eaLnBrk="1" hangingPunct="1">
-              <a:lnSpc>
-                <a:spcPct val="100000"/>
-              </a:lnSpc>
-              <a:spcBef>
-                <a:spcPts val="600"/>
-              </a:spcBef>
-              <a:spcAft>
-                <a:spcPts val="200"/>
-              </a:spcAft>
-              <a:buNone/>
-            </a:pPr>
-            <a:r>
-              <a:rPr sz="2800" b="1" lang="zh-CN" altLang="en-US">
-                <a:solidFill>
-                  <a:srgbClr val="A33B38"/>
-                </a:solidFill>
-                <a:latin typeface="微软雅黑"/>
-                <a:ea typeface="微软雅黑"/>
-                <a:cs typeface="微软雅黑"/>
-              </a:rPr>
-              <a:t>3A 和测试方法名</a:t>
-            </a:r>
-          </a:p>
-        </p:txBody>
-      </p:sp>
-      <p:sp>
-        <p:nvSpPr>
-          <p:cNvPr id="101" name="fig-d"/>
-          <p:cNvSpPr/>
-          <p:nvPr/>
-        </p:nvSpPr>
-        <p:spPr>
-          <a:xfrm>
-            <a:off x="411480" y="1691640"/>
-            <a:ext cx="2606040" cy="640080"/>
-          </a:xfrm>
-          <a:prstGeom prst="homePlate">
-            <a:avLst/>
-          </a:prstGeom>
-          <a:solidFill>
-            <a:srgbClr val="A33B38"/>
-          </a:solidFill>
-          <a:ln w="12700">
-            <a:solidFill>
-              <a:srgbClr val="A33B38"/>
-            </a:solidFill>
-          </a:ln>
-        </p:spPr>
-        <p:txBody>
-          <a:bodyPr wrap="square" lIns="73152" rIns="73152" tIns="36576" bIns="36576" anchor="ctr"/>
-          <a:lstStyle/>
-          <a:p>
-            <a:pPr algn="ctr">
-              <a:lnSpc>
-                <a:spcPct val="100000"/>
-              </a:lnSpc>
-              <a:buNone/>
-            </a:pPr>
-            <a:r>
-              <a:rPr lang="zh-CN" altLang="en-US" sz="2400" b="1">
-                <a:solidFill>
-                  <a:srgbClr val="FFFFFF"/>
-                </a:solidFill>
-                <a:latin typeface="微软雅黑"/>
-                <a:ea typeface="微软雅黑"/>
-              </a:rPr>
-              <a:t>Arrange</a:t>
-            </a:r>
-            <a:endParaRPr lang="zh-CN" sz="2400">
-              <a:latin typeface="微软雅黑"/>
-              <a:ea typeface="微软雅黑"/>
-            </a:endParaRPr>
-          </a:p>
-        </p:txBody>
-      </p:sp>
-      <p:sp>
-        <p:nvSpPr>
-          <p:cNvPr id="102" name="fig"/>
-          <p:cNvSpPr/>
-          <p:nvPr/>
-        </p:nvSpPr>
-        <p:spPr>
-          <a:xfrm>
-            <a:off x="411480" y="2423160"/>
-            <a:ext cx="2606040" cy="1371600"/>
-          </a:xfrm>
-          <a:prstGeom prst="roundRect">
-            <a:avLst/>
-          </a:prstGeom>
-          <a:solidFill>
-            <a:srgbClr val="F6E8E6"/>
-          </a:solidFill>
-          <a:ln w="12700">
-            <a:solidFill>
-              <a:srgbClr val="A33B38"/>
-            </a:solidFill>
-          </a:ln>
-        </p:spPr>
-        <p:txBody>
-          <a:bodyPr wrap="square" lIns="73152" rIns="73152" tIns="36576" bIns="36576" anchor="ctr"/>
-          <a:lstStyle/>
-          <a:p>
-            <a:pPr algn="ctr">
-              <a:lnSpc>
-                <a:spcPct val="100000"/>
-              </a:lnSpc>
-              <a:buNone/>
-            </a:pPr>
-            <a:r>
-              <a:rPr lang="zh-CN" altLang="en-US" sz="2000" b="0">
-                <a:solidFill>
-                  <a:srgbClr val="262626"/>
-                </a:solidFill>
-                <a:latin typeface="微软雅黑"/>
-                <a:ea typeface="微软雅黑"/>
-              </a:rPr>
-              <a:t>Arrange：准备输入和对象</a:t>
-            </a:r>
-            <a:endParaRPr lang="zh-CN" sz="2000">
-              <a:latin typeface="微软雅黑"/>
-              <a:ea typeface="微软雅黑"/>
-            </a:endParaRPr>
-          </a:p>
-        </p:txBody>
-      </p:sp>
-      <p:sp>
-        <p:nvSpPr>
-          <p:cNvPr id="103" name="fig-d"/>
-          <p:cNvSpPr/>
-          <p:nvPr/>
-        </p:nvSpPr>
-        <p:spPr>
-          <a:xfrm>
-            <a:off x="3246120" y="1691640"/>
-            <a:ext cx="2606040" cy="640080"/>
-          </a:xfrm>
-          <a:prstGeom prst="homePlate">
-            <a:avLst/>
-          </a:prstGeom>
-          <a:solidFill>
-            <a:srgbClr val="A33B38"/>
-          </a:solidFill>
-          <a:ln w="12700">
-            <a:solidFill>
-              <a:srgbClr val="A33B38"/>
-            </a:solidFill>
-          </a:ln>
-        </p:spPr>
-        <p:txBody>
-          <a:bodyPr wrap="square" lIns="73152" rIns="73152" tIns="36576" bIns="36576" anchor="ctr"/>
-          <a:lstStyle/>
-          <a:p>
-            <a:pPr algn="ctr">
-              <a:lnSpc>
-                <a:spcPct val="100000"/>
-              </a:lnSpc>
-              <a:buNone/>
-            </a:pPr>
-            <a:r>
-              <a:rPr lang="zh-CN" altLang="en-US" sz="2400" b="1">
-                <a:solidFill>
-                  <a:srgbClr val="FFFFFF"/>
-                </a:solidFill>
-                <a:latin typeface="微软雅黑"/>
-                <a:ea typeface="微软雅黑"/>
-              </a:rPr>
-              <a:t>Act</a:t>
-            </a:r>
-            <a:endParaRPr lang="zh-CN" sz="2400">
-              <a:latin typeface="微软雅黑"/>
-              <a:ea typeface="微软雅黑"/>
-            </a:endParaRPr>
-          </a:p>
-        </p:txBody>
-      </p:sp>
-      <p:sp>
-        <p:nvSpPr>
-          <p:cNvPr id="104" name="fig"/>
-          <p:cNvSpPr/>
-          <p:nvPr/>
-        </p:nvSpPr>
-        <p:spPr>
-          <a:xfrm>
-            <a:off x="3246120" y="2423160"/>
-            <a:ext cx="2606040" cy="1371600"/>
-          </a:xfrm>
-          <a:prstGeom prst="roundRect">
-            <a:avLst/>
-          </a:prstGeom>
-          <a:solidFill>
-            <a:srgbClr val="F6E8E6"/>
-          </a:solidFill>
-          <a:ln w="12700">
-            <a:solidFill>
-              <a:srgbClr val="A33B38"/>
-            </a:solidFill>
-          </a:ln>
-        </p:spPr>
-        <p:txBody>
-          <a:bodyPr wrap="square" lIns="73152" rIns="73152" tIns="36576" bIns="36576" anchor="ctr"/>
-          <a:lstStyle/>
-          <a:p>
-            <a:pPr algn="ctr">
-              <a:lnSpc>
-                <a:spcPct val="100000"/>
-              </a:lnSpc>
-              <a:buNone/>
-            </a:pPr>
-            <a:r>
-              <a:rPr lang="zh-CN" altLang="en-US" sz="2000" b="0">
-                <a:solidFill>
-                  <a:srgbClr val="262626"/>
-                </a:solidFill>
-                <a:latin typeface="微软雅黑"/>
-                <a:ea typeface="微软雅黑"/>
-              </a:rPr>
-              <a:t>Act：调用被测行为</a:t>
-            </a:r>
-            <a:endParaRPr lang="zh-CN" sz="2000">
-              <a:latin typeface="微软雅黑"/>
-              <a:ea typeface="微软雅黑"/>
-            </a:endParaRPr>
-          </a:p>
-        </p:txBody>
-      </p:sp>
-      <p:sp>
-        <p:nvSpPr>
-          <p:cNvPr id="105" name="fig-d"/>
-          <p:cNvSpPr/>
-          <p:nvPr/>
-        </p:nvSpPr>
-        <p:spPr>
-          <a:xfrm>
-            <a:off x="6080760" y="1691640"/>
-            <a:ext cx="2606040" cy="640080"/>
-          </a:xfrm>
-          <a:prstGeom prst="rect">
-            <a:avLst/>
-          </a:prstGeom>
-          <a:solidFill>
-            <a:srgbClr val="A33B38"/>
-          </a:solidFill>
-          <a:ln w="12700">
-            <a:solidFill>
-              <a:srgbClr val="A33B38"/>
-            </a:solidFill>
-          </a:ln>
-        </p:spPr>
-        <p:txBody>
-          <a:bodyPr wrap="square" lIns="73152" rIns="73152" tIns="36576" bIns="36576" anchor="ctr"/>
-          <a:lstStyle/>
-          <a:p>
-            <a:pPr algn="ctr">
-              <a:lnSpc>
-                <a:spcPct val="100000"/>
-              </a:lnSpc>
-              <a:buNone/>
-            </a:pPr>
-            <a:r>
-              <a:rPr lang="zh-CN" altLang="en-US" sz="2400" b="1">
-                <a:solidFill>
-                  <a:srgbClr val="FFFFFF"/>
-                </a:solidFill>
-                <a:latin typeface="微软雅黑"/>
-                <a:ea typeface="微软雅黑"/>
-              </a:rPr>
-              <a:t>Assert</a:t>
-            </a:r>
-            <a:endParaRPr lang="zh-CN" sz="2400">
-              <a:latin typeface="微软雅黑"/>
-              <a:ea typeface="微软雅黑"/>
-            </a:endParaRPr>
-          </a:p>
-        </p:txBody>
-      </p:sp>
-      <p:sp>
-        <p:nvSpPr>
-          <p:cNvPr id="106" name="fig"/>
-          <p:cNvSpPr/>
-          <p:nvPr/>
-        </p:nvSpPr>
-        <p:spPr>
-          <a:xfrm>
-            <a:off x="6080760" y="2423160"/>
-            <a:ext cx="2606040" cy="1371600"/>
-          </a:xfrm>
-          <a:prstGeom prst="roundRect">
-            <a:avLst/>
-          </a:prstGeom>
-          <a:solidFill>
-            <a:srgbClr val="F6E8E6"/>
-          </a:solidFill>
-          <a:ln w="12700">
-            <a:solidFill>
-              <a:srgbClr val="A33B38"/>
-            </a:solidFill>
-          </a:ln>
-        </p:spPr>
-        <p:txBody>
-          <a:bodyPr wrap="square" lIns="73152" rIns="73152" tIns="36576" bIns="36576" anchor="ctr"/>
-          <a:lstStyle/>
-          <a:p>
-            <a:pPr algn="ctr">
-              <a:lnSpc>
-                <a:spcPct val="100000"/>
-              </a:lnSpc>
-              <a:buNone/>
-            </a:pPr>
-            <a:r>
-              <a:rPr lang="zh-CN" altLang="en-US" sz="2000" b="0">
-                <a:solidFill>
-                  <a:srgbClr val="262626"/>
-                </a:solidFill>
-                <a:latin typeface="微软雅黑"/>
-                <a:ea typeface="微软雅黑"/>
-              </a:rPr>
-              <a:t>Assert：比较实际与期望</a:t>
-            </a:r>
-            <a:endParaRPr lang="zh-CN" sz="2000">
-              <a:latin typeface="微软雅黑"/>
-              <a:ea typeface="微软雅黑"/>
-            </a:endParaRPr>
-          </a:p>
-        </p:txBody>
-      </p:sp>
-      <p:sp>
-        <p:nvSpPr>
-          <p:cNvPr id="107" name="fig"/>
-          <p:cNvSpPr/>
-          <p:nvPr/>
-        </p:nvSpPr>
-        <p:spPr>
-          <a:xfrm>
-            <a:off x="411480" y="4114800"/>
-            <a:ext cx="8321040" cy="868680"/>
-          </a:xfrm>
-          <a:prstGeom prst="rect">
-            <a:avLst/>
-          </a:prstGeom>
-          <a:solidFill>
-            <a:srgbClr val="FFFFFF"/>
-          </a:solidFill>
-          <a:ln w="28575">
-            <a:solidFill>
-              <a:srgbClr val="A33B38"/>
-            </a:solidFill>
-          </a:ln>
-        </p:spPr>
-        <p:txBody>
-          <a:bodyPr wrap="square" lIns="73152" rIns="73152" tIns="36576" bIns="36576" anchor="ctr"/>
-          <a:lstStyle/>
-          <a:p>
-            <a:pPr algn="ctr">
-              <a:lnSpc>
-                <a:spcPct val="100000"/>
-              </a:lnSpc>
-              <a:buNone/>
-            </a:pPr>
-            <a:r>
-              <a:rPr lang="zh-CN" altLang="en-US" sz="2400" b="1">
-                <a:solidFill>
-                  <a:srgbClr val="A33B38"/>
-                </a:solidFill>
-                <a:latin typeface="微软雅黑"/>
-                <a:ea typeface="微软雅黑"/>
-              </a:rPr>
-              <a:t>方法名写下对象、输入和期望</a:t>
-            </a:r>
-            <a:endParaRPr lang="zh-CN" sz="2400">
-              <a:latin typeface="微软雅黑"/>
-              <a:ea typeface="微软雅黑"/>
-            </a:endParaRPr>
-          </a:p>
-        </p:txBody>
-      </p:sp>
-      <p:sp>
-        <p:nvSpPr>
-          <p:cNvPr id="108" name="sec-label"/>
-          <p:cNvSpPr txBox="1"/>
-          <p:nvPr/>
-        </p:nvSpPr>
-        <p:spPr>
-          <a:xfrm>
-            <a:off x="576072" y="36576"/>
-            <a:ext cx="8001000" cy="246888"/>
-          </a:xfrm>
-          <a:prstGeom prst="rect">
-            <a:avLst/>
-          </a:prstGeom>
-          <a:noFill/>
-        </p:spPr>
-        <p:txBody>
-          <a:bodyPr wrap="square" lIns="91440" rIns="91440" tIns="0" bIns="0" anchor="b"/>
-          <a:lstStyle/>
-          <a:p>
-            <a:pPr algn="l"/>
-            <a:r>
-              <a:rPr lang="zh-CN" altLang="en-US" sz="1200" b="0">
-                <a:solidFill>
-                  <a:srgbClr val="595959"/>
-                </a:solidFill>
-                <a:latin typeface="微软雅黑"/>
-                <a:ea typeface="微软雅黑"/>
-              </a:rPr>
-              <a:t>测试的基本要求</a:t>
-            </a:r>
-          </a:p>
-        </p:txBody>
-      </p:sp>
-    </p:spTree>
-  </p:cSld>
-  <p:clrMapOvr>
-    <a:masterClrMapping/>
-  </p:clrMapOvr>
-  <p:hf sldNum="0" hdr="0" ftr="0" dt="0"/>
-</p:sld>
-</file>
-
-<file path=ppt/slides/slide28.xml><?xml version="1.0" encoding="utf-8"?>
 <p:sld xmlns:a="http://schemas.openxmlformats.org/drawingml/2006/main" xmlns:p="http://schemas.openxmlformats.org/presentationml/2006/main" xmlns:r="http://schemas.openxmlformats.org/officeDocument/2006/relationships">
   <p:cSld>
     <p:spTree>
@@ -22013,6 +20882,1167 @@
       <p:sp>
         <p:nvSpPr>
           <p:cNvPr id="4" name="sec-label"/>
+          <p:cNvSpPr txBox="1"/>
+          <p:nvPr/>
+        </p:nvSpPr>
+        <p:spPr>
+          <a:xfrm>
+            <a:off x="576072" y="36576"/>
+            <a:ext cx="8001000" cy="246888"/>
+          </a:xfrm>
+          <a:prstGeom prst="rect">
+            <a:avLst/>
+          </a:prstGeom>
+          <a:noFill/>
+        </p:spPr>
+        <p:txBody>
+          <a:bodyPr wrap="square" lIns="91440" rIns="91440" tIns="0" bIns="0" anchor="b"/>
+          <a:lstStyle/>
+          <a:p>
+            <a:pPr algn="l"/>
+            <a:r>
+              <a:rPr lang="zh-CN" altLang="en-US" sz="1200" b="0">
+                <a:solidFill>
+                  <a:srgbClr val="595959"/>
+                </a:solidFill>
+                <a:latin typeface="微软雅黑"/>
+                <a:ea typeface="微软雅黑"/>
+              </a:rPr>
+              <a:t>测试的基本要求</a:t>
+            </a:r>
+          </a:p>
+        </p:txBody>
+      </p:sp>
+    </p:spTree>
+  </p:cSld>
+  <p:clrMapOvr>
+    <a:masterClrMapping/>
+  </p:clrMapOvr>
+  <p:hf sldNum="0" hdr="0" ftr="0" dt="0"/>
+</p:sld>
+</file>
+
+<file path=ppt/slides/slide27.xml><?xml version="1.0" encoding="utf-8"?>
+<p:sld xmlns:a="http://schemas.openxmlformats.org/drawingml/2006/main" xmlns:p="http://schemas.openxmlformats.org/presentationml/2006/main" xmlns:r="http://schemas.openxmlformats.org/officeDocument/2006/relationships">
+  <p:cSld>
+    <p:spTree>
+      <p:nvGrpSpPr>
+        <p:cNvPr id="1" name=""/>
+        <p:cNvGrpSpPr/>
+        <p:nvPr/>
+      </p:nvGrpSpPr>
+      <p:grpSpPr/>
+      <p:sp>
+        <p:nvSpPr>
+          <p:cNvPr id="2" name="Title 1"/>
+          <p:cNvSpPr>
+            <a:spLocks noGrp="1"/>
+          </p:cNvSpPr>
+          <p:nvPr>
+            <p:ph type="title"/>
+          </p:nvPr>
+        </p:nvSpPr>
+        <p:spPr/>
+        <p:txBody>
+          <a:bodyPr wrap="square" lIns="54864" rIns="54864" tIns="18288" bIns="18288" eaLnBrk="1" hangingPunct="1" latinLnBrk="0"/>
+          <a:lstStyle/>
+          <a:p>
+            <a:pPr algn="l" eaLnBrk="1" hangingPunct="1">
+              <a:lnSpc>
+                <a:spcPct val="100000"/>
+              </a:lnSpc>
+              <a:spcBef>
+                <a:spcPts val="600"/>
+              </a:spcBef>
+              <a:spcAft>
+                <a:spcPts val="200"/>
+              </a:spcAft>
+              <a:buNone/>
+            </a:pPr>
+            <a:r>
+              <a:rPr sz="2800" b="1" lang="zh-CN" altLang="en-US">
+                <a:solidFill>
+                  <a:srgbClr val="A33B38"/>
+                </a:solidFill>
+                <a:latin typeface="微软雅黑"/>
+                <a:ea typeface="微软雅黑"/>
+                <a:cs typeface="微软雅黑"/>
+              </a:rPr>
+              <a:t>四种覆盖准则</a:t>
+            </a:r>
+          </a:p>
+        </p:txBody>
+      </p:sp>
+      <p:sp>
+        <p:nvSpPr>
+          <p:cNvPr id="8" name="review"/>
+          <p:cNvSpPr txBox="1"/>
+          <p:nvPr/>
+        </p:nvSpPr>
+        <p:spPr>
+          <a:xfrm>
+            <a:off x="411480" y="5655564"/>
+            <a:ext cx="8321040" cy="329184"/>
+          </a:xfrm>
+          <a:prstGeom prst="rect">
+            <a:avLst/>
+          </a:prstGeom>
+          <a:solidFill>
+            <a:srgbClr val="FBF3F2"/>
+          </a:solidFill>
+          <a:ln w="9525">
+            <a:solidFill>
+              <a:srgbClr val="A33B38"/>
+            </a:solidFill>
+          </a:ln>
+        </p:spPr>
+        <p:txBody>
+          <a:bodyPr wrap="square" lIns="0" rIns="0" tIns="0" bIns="0">
+            <a:noAutofit/>
+          </a:bodyPr>
+          <a:lstStyle/>
+          <a:p>
+            <a:pPr algn="ctr"/>
+            <a:r>
+              <a:rPr sz="2000">
+                <a:solidFill>
+                  <a:srgbClr val="A33B38"/>
+                </a:solidFill>
+                <a:latin typeface="微软雅黑"/>
+                <a:ea typeface="微软雅黑"/>
+              </a:rPr>
+              <a:t>回顾 E3：行与分支覆盖率只说明跑过，不说明断言写对</a:t>
+            </a:r>
+          </a:p>
+        </p:txBody>
+      </p:sp>
+      <p:sp>
+        <p:nvSpPr>
+          <p:cNvPr id="101" name="fig-d"/>
+          <p:cNvSpPr/>
+          <p:nvPr/>
+        </p:nvSpPr>
+        <p:spPr>
+          <a:xfrm>
+            <a:off x="411480" y="1691640"/>
+            <a:ext cx="2651760" cy="457200"/>
+          </a:xfrm>
+          <a:prstGeom prst="rect">
+            <a:avLst/>
+          </a:prstGeom>
+          <a:noFill/>
+          <a:ln>
+            <a:noFill/>
+          </a:ln>
+        </p:spPr>
+        <p:txBody>
+          <a:bodyPr wrap="square" lIns="18288" rIns="18288" tIns="9144" bIns="9144" anchor="ctr"/>
+          <a:lstStyle/>
+          <a:p>
+            <a:pPr algn="l">
+              <a:lnSpc>
+                <a:spcPct val="100000"/>
+              </a:lnSpc>
+              <a:buNone/>
+            </a:pPr>
+            <a:r>
+              <a:rPr lang="zh-CN" altLang="en-US" sz="1600" b="0">
+                <a:solidFill>
+                  <a:srgbClr val="595959"/>
+                </a:solidFill>
+                <a:latin typeface="微软雅黑"/>
+                <a:ea typeface="微软雅黑"/>
+              </a:rPr>
+              <a:t>示意</a:t>
+            </a:r>
+            <a:endParaRPr lang="zh-CN" sz="1600">
+              <a:latin typeface="微软雅黑"/>
+              <a:ea typeface="微软雅黑"/>
+            </a:endParaRPr>
+          </a:p>
+        </p:txBody>
+      </p:sp>
+      <p:sp>
+        <p:nvSpPr>
+          <p:cNvPr id="102" name="fig-d"/>
+          <p:cNvSpPr/>
+          <p:nvPr/>
+        </p:nvSpPr>
+        <p:spPr>
+          <a:xfrm>
+            <a:off x="411480" y="2103120"/>
+            <a:ext cx="2651760" cy="1051560"/>
+          </a:xfrm>
+          <a:prstGeom prst="diamond">
+            <a:avLst/>
+          </a:prstGeom>
+          <a:solidFill>
+            <a:srgbClr val="F6E8E6"/>
+          </a:solidFill>
+          <a:ln w="12700">
+            <a:solidFill>
+              <a:srgbClr val="A33B38"/>
+            </a:solidFill>
+          </a:ln>
+        </p:spPr>
+        <p:txBody>
+          <a:bodyPr wrap="square" lIns="73152" rIns="73152" tIns="36576" bIns="36576" anchor="ctr"/>
+          <a:lstStyle/>
+          <a:p>
+            <a:pPr algn="ctr">
+              <a:lnSpc>
+                <a:spcPct val="100000"/>
+              </a:lnSpc>
+              <a:buNone/>
+            </a:pPr>
+            <a:r>
+              <a:rPr lang="zh-CN" altLang="en-US" sz="1800" b="1">
+                <a:solidFill>
+                  <a:srgbClr val="262626"/>
+                </a:solidFill>
+                <a:latin typeface="微软雅黑"/>
+                <a:ea typeface="微软雅黑"/>
+              </a:rPr>
+              <a:t>甲 &amp;&amp; 乙</a:t>
+            </a:r>
+            <a:endParaRPr lang="zh-CN" sz="1800">
+              <a:latin typeface="微软雅黑"/>
+              <a:ea typeface="微软雅黑"/>
+            </a:endParaRPr>
+          </a:p>
+        </p:txBody>
+      </p:sp>
+      <p:sp>
+        <p:nvSpPr>
+          <p:cNvPr id="103" name="fig-d"/>
+          <p:cNvSpPr/>
+          <p:nvPr/>
+        </p:nvSpPr>
+        <p:spPr>
+          <a:xfrm>
+            <a:off x="822960" y="2926080"/>
+            <a:ext cx="9144" cy="685800"/>
+          </a:xfrm>
+          <a:custGeom>
+            <a:avLst/>
+            <a:gdLst/>
+            <a:ahLst/>
+            <a:cxnLst/>
+            <a:rect l="0" t="0" r="r" b="b"/>
+            <a:pathLst>
+              <a:path w="9144" h="685800" fill="none">
+                <a:moveTo>
+                  <a:pt x="0" y="0"/>
+                </a:moveTo>
+                <a:lnTo>
+                  <a:pt x="0" y="685800"/>
+                </a:lnTo>
+              </a:path>
+            </a:pathLst>
+          </a:custGeom>
+          <a:noFill/>
+          <a:ln w="22225">
+            <a:solidFill>
+              <a:srgbClr val="595959"/>
+            </a:solidFill>
+            <a:tailEnd type="triangle" w="med" len="med"/>
+          </a:ln>
+        </p:spPr>
+        <p:txBody>
+          <a:bodyPr/>
+          <a:lstStyle/>
+          <a:p>
+            <a:endParaRPr lang="zh-CN">
+              <a:latin typeface="微软雅黑"/>
+              <a:ea typeface="微软雅黑"/>
+            </a:endParaRPr>
+          </a:p>
+        </p:txBody>
+      </p:sp>
+      <p:sp>
+        <p:nvSpPr>
+          <p:cNvPr id="104" name="fig-d"/>
+          <p:cNvSpPr/>
+          <p:nvPr/>
+        </p:nvSpPr>
+        <p:spPr>
+          <a:xfrm>
+            <a:off x="2651760" y="2926080"/>
+            <a:ext cx="9144" cy="685800"/>
+          </a:xfrm>
+          <a:custGeom>
+            <a:avLst/>
+            <a:gdLst/>
+            <a:ahLst/>
+            <a:cxnLst/>
+            <a:rect l="0" t="0" r="r" b="b"/>
+            <a:pathLst>
+              <a:path w="9144" h="685800" fill="none">
+                <a:moveTo>
+                  <a:pt x="0" y="0"/>
+                </a:moveTo>
+                <a:lnTo>
+                  <a:pt x="0" y="685800"/>
+                </a:lnTo>
+              </a:path>
+            </a:pathLst>
+          </a:custGeom>
+          <a:noFill/>
+          <a:ln w="22225">
+            <a:solidFill>
+              <a:srgbClr val="595959"/>
+            </a:solidFill>
+            <a:tailEnd type="triangle" w="med" len="med"/>
+          </a:ln>
+        </p:spPr>
+        <p:txBody>
+          <a:bodyPr/>
+          <a:lstStyle/>
+          <a:p>
+            <a:endParaRPr lang="zh-CN">
+              <a:latin typeface="微软雅黑"/>
+              <a:ea typeface="微软雅黑"/>
+            </a:endParaRPr>
+          </a:p>
+        </p:txBody>
+      </p:sp>
+      <p:sp>
+        <p:nvSpPr>
+          <p:cNvPr id="105" name="fig-d"/>
+          <p:cNvSpPr/>
+          <p:nvPr/>
+        </p:nvSpPr>
+        <p:spPr>
+          <a:xfrm>
+            <a:off x="896112" y="3108960"/>
+            <a:ext cx="548640" cy="292608"/>
+          </a:xfrm>
+          <a:prstGeom prst="rect">
+            <a:avLst/>
+          </a:prstGeom>
+          <a:noFill/>
+          <a:ln>
+            <a:noFill/>
+          </a:ln>
+        </p:spPr>
+        <p:txBody>
+          <a:bodyPr wrap="square" lIns="18288" rIns="18288" tIns="9144" bIns="9144" anchor="ctr"/>
+          <a:lstStyle/>
+          <a:p>
+            <a:pPr algn="l">
+              <a:lnSpc>
+                <a:spcPct val="100000"/>
+              </a:lnSpc>
+              <a:buNone/>
+            </a:pPr>
+            <a:r>
+              <a:rPr lang="zh-CN" altLang="en-US" sz="1600" b="1">
+                <a:solidFill>
+                  <a:srgbClr val="A33B38"/>
+                </a:solidFill>
+                <a:latin typeface="微软雅黑"/>
+                <a:ea typeface="微软雅黑"/>
+              </a:rPr>
+              <a:t>真</a:t>
+            </a:r>
+            <a:endParaRPr lang="zh-CN" sz="1600">
+              <a:latin typeface="微软雅黑"/>
+              <a:ea typeface="微软雅黑"/>
+            </a:endParaRPr>
+          </a:p>
+        </p:txBody>
+      </p:sp>
+      <p:sp>
+        <p:nvSpPr>
+          <p:cNvPr id="106" name="fig-d"/>
+          <p:cNvSpPr/>
+          <p:nvPr/>
+        </p:nvSpPr>
+        <p:spPr>
+          <a:xfrm>
+            <a:off x="2724912" y="3273552"/>
+            <a:ext cx="548640" cy="292608"/>
+          </a:xfrm>
+          <a:prstGeom prst="rect">
+            <a:avLst/>
+          </a:prstGeom>
+          <a:noFill/>
+          <a:ln>
+            <a:noFill/>
+          </a:ln>
+        </p:spPr>
+        <p:txBody>
+          <a:bodyPr wrap="square" lIns="18288" rIns="18288" tIns="9144" bIns="9144" anchor="ctr"/>
+          <a:lstStyle/>
+          <a:p>
+            <a:pPr algn="l">
+              <a:lnSpc>
+                <a:spcPct val="100000"/>
+              </a:lnSpc>
+              <a:buNone/>
+            </a:pPr>
+            <a:r>
+              <a:rPr lang="zh-CN" altLang="en-US" sz="1600" b="1">
+                <a:solidFill>
+                  <a:srgbClr val="A33B38"/>
+                </a:solidFill>
+                <a:latin typeface="微软雅黑"/>
+                <a:ea typeface="微软雅黑"/>
+              </a:rPr>
+              <a:t>假</a:t>
+            </a:r>
+            <a:endParaRPr lang="zh-CN" sz="1600">
+              <a:latin typeface="微软雅黑"/>
+              <a:ea typeface="微软雅黑"/>
+            </a:endParaRPr>
+          </a:p>
+        </p:txBody>
+      </p:sp>
+      <p:sp>
+        <p:nvSpPr>
+          <p:cNvPr id="107" name="fig-d"/>
+          <p:cNvSpPr/>
+          <p:nvPr/>
+        </p:nvSpPr>
+        <p:spPr>
+          <a:xfrm>
+            <a:off x="411480" y="3611880"/>
+            <a:ext cx="868680" cy="411480"/>
+          </a:xfrm>
+          <a:prstGeom prst="rect">
+            <a:avLst/>
+          </a:prstGeom>
+          <a:solidFill>
+            <a:srgbClr val="FFFFFF"/>
+          </a:solidFill>
+          <a:ln w="12700">
+            <a:solidFill>
+              <a:srgbClr val="A6A6A6"/>
+            </a:solidFill>
+          </a:ln>
+        </p:spPr>
+        <p:txBody>
+          <a:bodyPr wrap="square" lIns="73152" rIns="73152" tIns="36576" bIns="36576" anchor="ctr"/>
+          <a:lstStyle/>
+          <a:p>
+            <a:pPr algn="ctr">
+              <a:lnSpc>
+                <a:spcPct val="100000"/>
+              </a:lnSpc>
+              <a:buNone/>
+            </a:pPr>
+            <a:r>
+              <a:rPr lang="zh-CN" altLang="en-US" sz="1600" b="0">
+                <a:solidFill>
+                  <a:srgbClr val="262626"/>
+                </a:solidFill>
+                <a:latin typeface="微软雅黑"/>
+                <a:ea typeface="微软雅黑"/>
+              </a:rPr>
+              <a:t>通过</a:t>
+            </a:r>
+            <a:endParaRPr lang="zh-CN" sz="1600">
+              <a:latin typeface="微软雅黑"/>
+              <a:ea typeface="微软雅黑"/>
+            </a:endParaRPr>
+          </a:p>
+        </p:txBody>
+      </p:sp>
+      <p:sp>
+        <p:nvSpPr>
+          <p:cNvPr id="108" name="fig-d"/>
+          <p:cNvSpPr/>
+          <p:nvPr/>
+        </p:nvSpPr>
+        <p:spPr>
+          <a:xfrm>
+            <a:off x="2194560" y="3611880"/>
+            <a:ext cx="868680" cy="411480"/>
+          </a:xfrm>
+          <a:prstGeom prst="rect">
+            <a:avLst/>
+          </a:prstGeom>
+          <a:solidFill>
+            <a:srgbClr val="FFFFFF"/>
+          </a:solidFill>
+          <a:ln w="12700">
+            <a:solidFill>
+              <a:srgbClr val="A6A6A6"/>
+            </a:solidFill>
+          </a:ln>
+        </p:spPr>
+        <p:txBody>
+          <a:bodyPr wrap="square" lIns="73152" rIns="73152" tIns="36576" bIns="36576" anchor="ctr"/>
+          <a:lstStyle/>
+          <a:p>
+            <a:pPr algn="ctr">
+              <a:lnSpc>
+                <a:spcPct val="100000"/>
+              </a:lnSpc>
+              <a:buNone/>
+            </a:pPr>
+            <a:r>
+              <a:rPr lang="zh-CN" altLang="en-US" sz="1600" b="0">
+                <a:solidFill>
+                  <a:srgbClr val="262626"/>
+                </a:solidFill>
+                <a:latin typeface="微软雅黑"/>
+                <a:ea typeface="微软雅黑"/>
+              </a:rPr>
+              <a:t>拒绝</a:t>
+            </a:r>
+            <a:endParaRPr lang="zh-CN" sz="1600">
+              <a:latin typeface="微软雅黑"/>
+              <a:ea typeface="微软雅黑"/>
+            </a:endParaRPr>
+          </a:p>
+        </p:txBody>
+      </p:sp>
+      <p:sp>
+        <p:nvSpPr>
+          <p:cNvPr id="109" name="fig"/>
+          <p:cNvSpPr/>
+          <p:nvPr/>
+        </p:nvSpPr>
+        <p:spPr>
+          <a:xfrm>
+            <a:off x="3383280" y="1645920"/>
+            <a:ext cx="5349240" cy="548640"/>
+          </a:xfrm>
+          <a:prstGeom prst="rect">
+            <a:avLst/>
+          </a:prstGeom>
+          <a:solidFill>
+            <a:srgbClr val="F6E8E6"/>
+          </a:solidFill>
+          <a:ln w="12700">
+            <a:solidFill>
+              <a:srgbClr val="A33B38"/>
+            </a:solidFill>
+          </a:ln>
+        </p:spPr>
+        <p:txBody>
+          <a:bodyPr wrap="square" lIns="73152" rIns="73152" tIns="36576" bIns="36576" anchor="ctr"/>
+          <a:lstStyle/>
+          <a:p>
+            <a:pPr algn="l">
+              <a:lnSpc>
+                <a:spcPct val="100000"/>
+              </a:lnSpc>
+              <a:buNone/>
+            </a:pPr>
+            <a:r>
+              <a:rPr lang="zh-CN" altLang="en-US" sz="2000" b="0">
+                <a:solidFill>
+                  <a:srgbClr val="262626"/>
+                </a:solidFill>
+                <a:latin typeface="微软雅黑"/>
+                <a:ea typeface="微软雅黑"/>
+              </a:rPr>
+              <a:t>行覆盖：哪些行执行过</a:t>
+            </a:r>
+            <a:endParaRPr lang="zh-CN" sz="2000">
+              <a:latin typeface="微软雅黑"/>
+              <a:ea typeface="微软雅黑"/>
+            </a:endParaRPr>
+          </a:p>
+        </p:txBody>
+      </p:sp>
+      <p:sp>
+        <p:nvSpPr>
+          <p:cNvPr id="110" name="fig"/>
+          <p:cNvSpPr/>
+          <p:nvPr/>
+        </p:nvSpPr>
+        <p:spPr>
+          <a:xfrm>
+            <a:off x="3383280" y="2286000"/>
+            <a:ext cx="5349240" cy="548640"/>
+          </a:xfrm>
+          <a:prstGeom prst="rect">
+            <a:avLst/>
+          </a:prstGeom>
+          <a:solidFill>
+            <a:srgbClr val="F6E8E6"/>
+          </a:solidFill>
+          <a:ln w="12700">
+            <a:solidFill>
+              <a:srgbClr val="A33B38"/>
+            </a:solidFill>
+          </a:ln>
+        </p:spPr>
+        <p:txBody>
+          <a:bodyPr wrap="square" lIns="73152" rIns="73152" tIns="36576" bIns="36576" anchor="ctr"/>
+          <a:lstStyle/>
+          <a:p>
+            <a:pPr algn="l">
+              <a:lnSpc>
+                <a:spcPct val="100000"/>
+              </a:lnSpc>
+              <a:buNone/>
+            </a:pPr>
+            <a:r>
+              <a:rPr lang="zh-CN" altLang="en-US" sz="2000" b="0">
+                <a:solidFill>
+                  <a:srgbClr val="262626"/>
+                </a:solidFill>
+                <a:latin typeface="微软雅黑"/>
+                <a:ea typeface="微软雅黑"/>
+              </a:rPr>
+              <a:t>判定覆盖：判定的真假是否都出现</a:t>
+            </a:r>
+            <a:endParaRPr lang="zh-CN" sz="2000">
+              <a:latin typeface="微软雅黑"/>
+              <a:ea typeface="微软雅黑"/>
+            </a:endParaRPr>
+          </a:p>
+        </p:txBody>
+      </p:sp>
+      <p:sp>
+        <p:nvSpPr>
+          <p:cNvPr id="111" name="fig"/>
+          <p:cNvSpPr/>
+          <p:nvPr/>
+        </p:nvSpPr>
+        <p:spPr>
+          <a:xfrm>
+            <a:off x="3383280" y="2926080"/>
+            <a:ext cx="5349240" cy="548640"/>
+          </a:xfrm>
+          <a:prstGeom prst="rect">
+            <a:avLst/>
+          </a:prstGeom>
+          <a:solidFill>
+            <a:srgbClr val="F6E8E6"/>
+          </a:solidFill>
+          <a:ln w="12700">
+            <a:solidFill>
+              <a:srgbClr val="A33B38"/>
+            </a:solidFill>
+          </a:ln>
+        </p:spPr>
+        <p:txBody>
+          <a:bodyPr wrap="square" lIns="73152" rIns="73152" tIns="36576" bIns="36576" anchor="ctr"/>
+          <a:lstStyle/>
+          <a:p>
+            <a:pPr algn="l">
+              <a:lnSpc>
+                <a:spcPct val="100000"/>
+              </a:lnSpc>
+              <a:buNone/>
+            </a:pPr>
+            <a:r>
+              <a:rPr lang="zh-CN" altLang="en-US" sz="2000" b="0">
+                <a:solidFill>
+                  <a:srgbClr val="262626"/>
+                </a:solidFill>
+                <a:latin typeface="微软雅黑"/>
+                <a:ea typeface="微软雅黑"/>
+              </a:rPr>
+              <a:t>条件覆盖：每个条件的真假是否都出现</a:t>
+            </a:r>
+            <a:endParaRPr lang="zh-CN" sz="2000">
+              <a:latin typeface="微软雅黑"/>
+              <a:ea typeface="微软雅黑"/>
+            </a:endParaRPr>
+          </a:p>
+        </p:txBody>
+      </p:sp>
+      <p:sp>
+        <p:nvSpPr>
+          <p:cNvPr id="112" name="fig"/>
+          <p:cNvSpPr/>
+          <p:nvPr/>
+        </p:nvSpPr>
+        <p:spPr>
+          <a:xfrm>
+            <a:off x="3383280" y="3566160"/>
+            <a:ext cx="5349240" cy="868680"/>
+          </a:xfrm>
+          <a:prstGeom prst="rect">
+            <a:avLst/>
+          </a:prstGeom>
+          <a:solidFill>
+            <a:srgbClr val="F6E8E6"/>
+          </a:solidFill>
+          <a:ln w="12700">
+            <a:solidFill>
+              <a:srgbClr val="A33B38"/>
+            </a:solidFill>
+          </a:ln>
+        </p:spPr>
+        <p:txBody>
+          <a:bodyPr wrap="square" lIns="73152" rIns="73152" tIns="36576" bIns="36576" anchor="ctr"/>
+          <a:lstStyle/>
+          <a:p>
+            <a:pPr algn="l">
+              <a:lnSpc>
+                <a:spcPct val="100000"/>
+              </a:lnSpc>
+              <a:buNone/>
+            </a:pPr>
+            <a:r>
+              <a:rPr lang="zh-CN" altLang="en-US" sz="2000" b="0">
+                <a:solidFill>
+                  <a:srgbClr val="262626"/>
+                </a:solidFill>
+                <a:latin typeface="微软雅黑"/>
+                <a:ea typeface="微软雅黑"/>
+              </a:rPr>
+              <a:t>MC/DC：每个基本条件都能在其他条件保持不变时，独立改变整个判定结果</a:t>
+            </a:r>
+            <a:endParaRPr lang="zh-CN" sz="2000">
+              <a:latin typeface="微软雅黑"/>
+              <a:ea typeface="微软雅黑"/>
+            </a:endParaRPr>
+          </a:p>
+        </p:txBody>
+      </p:sp>
+      <p:sp>
+        <p:nvSpPr>
+          <p:cNvPr id="113" name="fig"/>
+          <p:cNvSpPr/>
+          <p:nvPr/>
+        </p:nvSpPr>
+        <p:spPr>
+          <a:xfrm>
+            <a:off x="411480" y="4709160"/>
+            <a:ext cx="8321040" cy="548640"/>
+          </a:xfrm>
+          <a:prstGeom prst="rect">
+            <a:avLst/>
+          </a:prstGeom>
+          <a:solidFill>
+            <a:srgbClr val="F5F5F5"/>
+          </a:solidFill>
+          <a:ln>
+            <a:noFill/>
+          </a:ln>
+        </p:spPr>
+        <p:txBody>
+          <a:bodyPr wrap="square" lIns="73152" rIns="73152" tIns="36576" bIns="36576" anchor="ctr"/>
+          <a:lstStyle/>
+          <a:p>
+            <a:pPr algn="l">
+              <a:lnSpc>
+                <a:spcPct val="100000"/>
+              </a:lnSpc>
+              <a:buNone/>
+            </a:pPr>
+            <a:r>
+              <a:rPr lang="zh-CN" altLang="en-US" sz="2000" b="0">
+                <a:solidFill>
+                  <a:srgbClr val="595959"/>
+                </a:solidFill>
+                <a:latin typeface="微软雅黑"/>
+                <a:ea typeface="微软雅黑"/>
+              </a:rPr>
+              <a:t>课程 JaCoCo 不给 MC/DC</a:t>
+            </a:r>
+            <a:endParaRPr lang="zh-CN" sz="2000">
+              <a:latin typeface="微软雅黑"/>
+              <a:ea typeface="微软雅黑"/>
+            </a:endParaRPr>
+          </a:p>
+        </p:txBody>
+      </p:sp>
+      <p:sp>
+        <p:nvSpPr>
+          <p:cNvPr id="114" name="sec-label"/>
+          <p:cNvSpPr txBox="1"/>
+          <p:nvPr/>
+        </p:nvSpPr>
+        <p:spPr>
+          <a:xfrm>
+            <a:off x="576072" y="36576"/>
+            <a:ext cx="8001000" cy="246888"/>
+          </a:xfrm>
+          <a:prstGeom prst="rect">
+            <a:avLst/>
+          </a:prstGeom>
+          <a:noFill/>
+        </p:spPr>
+        <p:txBody>
+          <a:bodyPr wrap="square" lIns="91440" rIns="91440" tIns="0" bIns="0" anchor="b"/>
+          <a:lstStyle/>
+          <a:p>
+            <a:pPr algn="l"/>
+            <a:r>
+              <a:rPr lang="zh-CN" altLang="en-US" sz="1200" b="0">
+                <a:solidFill>
+                  <a:srgbClr val="595959"/>
+                </a:solidFill>
+                <a:latin typeface="微软雅黑"/>
+                <a:ea typeface="微软雅黑"/>
+              </a:rPr>
+              <a:t>测试的基本要求</a:t>
+            </a:r>
+          </a:p>
+        </p:txBody>
+      </p:sp>
+    </p:spTree>
+  </p:cSld>
+  <p:clrMapOvr>
+    <a:masterClrMapping/>
+  </p:clrMapOvr>
+  <p:hf sldNum="0" hdr="0" ftr="0" dt="0"/>
+</p:sld>
+</file>
+
+<file path=ppt/slides/slide28.xml><?xml version="1.0" encoding="utf-8"?>
+<p:sld xmlns:a="http://schemas.openxmlformats.org/drawingml/2006/main" xmlns:p="http://schemas.openxmlformats.org/presentationml/2006/main" xmlns:r="http://schemas.openxmlformats.org/officeDocument/2006/relationships">
+  <p:cSld>
+    <p:spTree>
+      <p:nvGrpSpPr>
+        <p:cNvPr id="1" name=""/>
+        <p:cNvGrpSpPr/>
+        <p:nvPr/>
+      </p:nvGrpSpPr>
+      <p:grpSpPr/>
+      <p:sp>
+        <p:nvSpPr>
+          <p:cNvPr id="2" name="Title 1"/>
+          <p:cNvSpPr>
+            <a:spLocks noGrp="1"/>
+          </p:cNvSpPr>
+          <p:nvPr>
+            <p:ph type="title"/>
+          </p:nvPr>
+        </p:nvSpPr>
+        <p:spPr/>
+        <p:txBody>
+          <a:bodyPr wrap="square" lIns="54864" rIns="54864" tIns="18288" bIns="18288" eaLnBrk="1" hangingPunct="1" latinLnBrk="0"/>
+          <a:lstStyle/>
+          <a:p>
+            <a:pPr algn="l" eaLnBrk="1" hangingPunct="1">
+              <a:lnSpc>
+                <a:spcPct val="100000"/>
+              </a:lnSpc>
+              <a:spcBef>
+                <a:spcPts val="600"/>
+              </a:spcBef>
+              <a:spcAft>
+                <a:spcPts val="200"/>
+              </a:spcAft>
+              <a:buNone/>
+            </a:pPr>
+            <a:r>
+              <a:rPr sz="2800" b="1" lang="zh-CN" altLang="en-US">
+                <a:solidFill>
+                  <a:srgbClr val="A33B38"/>
+                </a:solidFill>
+                <a:latin typeface="微软雅黑"/>
+                <a:ea typeface="微软雅黑"/>
+                <a:cs typeface="微软雅黑"/>
+              </a:rPr>
+              <a:t>覆盖证明不了的事</a:t>
+            </a:r>
+          </a:p>
+        </p:txBody>
+      </p:sp>
+      <p:sp>
+        <p:nvSpPr>
+          <p:cNvPr id="101" name="fig-d"/>
+          <p:cNvSpPr/>
+          <p:nvPr/>
+        </p:nvSpPr>
+        <p:spPr>
+          <a:xfrm>
+            <a:off x="411480" y="1645920"/>
+            <a:ext cx="4069080" cy="502920"/>
+          </a:xfrm>
+          <a:prstGeom prst="rect">
+            <a:avLst/>
+          </a:prstGeom>
+          <a:solidFill>
+            <a:srgbClr val="595959"/>
+          </a:solidFill>
+          <a:ln w="12700">
+            <a:solidFill>
+              <a:srgbClr val="595959"/>
+            </a:solidFill>
+          </a:ln>
+        </p:spPr>
+        <p:txBody>
+          <a:bodyPr wrap="square" lIns="73152" rIns="73152" tIns="36576" bIns="36576" anchor="ctr"/>
+          <a:lstStyle/>
+          <a:p>
+            <a:pPr algn="ctr">
+              <a:lnSpc>
+                <a:spcPct val="100000"/>
+              </a:lnSpc>
+              <a:buNone/>
+            </a:pPr>
+            <a:r>
+              <a:rPr lang="zh-CN" altLang="en-US" sz="2000" b="1">
+                <a:solidFill>
+                  <a:srgbClr val="FFFFFF"/>
+                </a:solidFill>
+                <a:latin typeface="微软雅黑"/>
+                <a:ea typeface="微软雅黑"/>
+              </a:rPr>
+              <a:t>能说明</a:t>
+            </a:r>
+            <a:endParaRPr lang="zh-CN" sz="2000">
+              <a:latin typeface="微软雅黑"/>
+              <a:ea typeface="微软雅黑"/>
+            </a:endParaRPr>
+          </a:p>
+        </p:txBody>
+      </p:sp>
+      <p:sp>
+        <p:nvSpPr>
+          <p:cNvPr id="102" name="fig-d"/>
+          <p:cNvSpPr/>
+          <p:nvPr/>
+        </p:nvSpPr>
+        <p:spPr>
+          <a:xfrm>
+            <a:off x="4663440" y="1645920"/>
+            <a:ext cx="4069080" cy="502920"/>
+          </a:xfrm>
+          <a:prstGeom prst="rect">
+            <a:avLst/>
+          </a:prstGeom>
+          <a:solidFill>
+            <a:srgbClr val="A33B38"/>
+          </a:solidFill>
+          <a:ln w="12700">
+            <a:solidFill>
+              <a:srgbClr val="A33B38"/>
+            </a:solidFill>
+          </a:ln>
+        </p:spPr>
+        <p:txBody>
+          <a:bodyPr wrap="square" lIns="73152" rIns="73152" tIns="36576" bIns="36576" anchor="ctr"/>
+          <a:lstStyle/>
+          <a:p>
+            <a:pPr algn="ctr">
+              <a:lnSpc>
+                <a:spcPct val="100000"/>
+              </a:lnSpc>
+              <a:buNone/>
+            </a:pPr>
+            <a:r>
+              <a:rPr lang="zh-CN" altLang="en-US" sz="2000" b="1">
+                <a:solidFill>
+                  <a:srgbClr val="FFFFFF"/>
+                </a:solidFill>
+                <a:latin typeface="微软雅黑"/>
+                <a:ea typeface="微软雅黑"/>
+              </a:rPr>
+              <a:t>不能说明</a:t>
+            </a:r>
+            <a:endParaRPr lang="zh-CN" sz="2000">
+              <a:latin typeface="微软雅黑"/>
+              <a:ea typeface="微软雅黑"/>
+            </a:endParaRPr>
+          </a:p>
+        </p:txBody>
+      </p:sp>
+      <p:sp>
+        <p:nvSpPr>
+          <p:cNvPr id="103" name="fig"/>
+          <p:cNvSpPr/>
+          <p:nvPr/>
+        </p:nvSpPr>
+        <p:spPr>
+          <a:xfrm>
+            <a:off x="411480" y="2240280"/>
+            <a:ext cx="4069080" cy="1965960"/>
+          </a:xfrm>
+          <a:prstGeom prst="roundRect">
+            <a:avLst/>
+          </a:prstGeom>
+          <a:solidFill>
+            <a:srgbClr val="F5F5F5"/>
+          </a:solidFill>
+          <a:ln w="12700">
+            <a:solidFill>
+              <a:srgbClr val="A6A6A6"/>
+            </a:solidFill>
+          </a:ln>
+        </p:spPr>
+        <p:txBody>
+          <a:bodyPr wrap="square" lIns="73152" rIns="73152" tIns="36576" bIns="36576" anchor="ctr"/>
+          <a:lstStyle/>
+          <a:p>
+            <a:pPr algn="ctr">
+              <a:lnSpc>
+                <a:spcPct val="100000"/>
+              </a:lnSpc>
+              <a:buNone/>
+            </a:pPr>
+            <a:r>
+              <a:rPr lang="zh-CN" altLang="en-US" sz="2200" b="0">
+                <a:solidFill>
+                  <a:srgbClr val="262626"/>
+                </a:solidFill>
+                <a:latin typeface="微软雅黑"/>
+                <a:ea typeface="微软雅黑"/>
+              </a:rPr>
+              <a:t>它说明这些行或分支跑过</a:t>
+            </a:r>
+            <a:endParaRPr lang="zh-CN" sz="2200">
+              <a:latin typeface="微软雅黑"/>
+              <a:ea typeface="微软雅黑"/>
+            </a:endParaRPr>
+          </a:p>
+        </p:txBody>
+      </p:sp>
+      <p:sp>
+        <p:nvSpPr>
+          <p:cNvPr id="104" name="fig"/>
+          <p:cNvSpPr/>
+          <p:nvPr/>
+        </p:nvSpPr>
+        <p:spPr>
+          <a:xfrm>
+            <a:off x="4663440" y="2240280"/>
+            <a:ext cx="4069080" cy="914400"/>
+          </a:xfrm>
+          <a:prstGeom prst="roundRect">
+            <a:avLst/>
+          </a:prstGeom>
+          <a:solidFill>
+            <a:srgbClr val="F6E8E6"/>
+          </a:solidFill>
+          <a:ln w="12700">
+            <a:solidFill>
+              <a:srgbClr val="A33B38"/>
+            </a:solidFill>
+          </a:ln>
+        </p:spPr>
+        <p:txBody>
+          <a:bodyPr wrap="square" lIns="73152" rIns="73152" tIns="36576" bIns="36576" anchor="ctr"/>
+          <a:lstStyle/>
+          <a:p>
+            <a:pPr algn="ctr">
+              <a:lnSpc>
+                <a:spcPct val="100000"/>
+              </a:lnSpc>
+              <a:buNone/>
+            </a:pPr>
+            <a:r>
+              <a:rPr lang="zh-CN" altLang="en-US" sz="2000" b="0">
+                <a:solidFill>
+                  <a:srgbClr val="262626"/>
+                </a:solidFill>
+                <a:latin typeface="微软雅黑"/>
+                <a:ea typeface="微软雅黑"/>
+              </a:rPr>
+              <a:t>它不说明断言写对了业务</a:t>
+            </a:r>
+            <a:endParaRPr lang="zh-CN" sz="2000">
+              <a:latin typeface="微软雅黑"/>
+              <a:ea typeface="微软雅黑"/>
+            </a:endParaRPr>
+          </a:p>
+        </p:txBody>
+      </p:sp>
+      <p:sp>
+        <p:nvSpPr>
+          <p:cNvPr id="105" name="fig"/>
+          <p:cNvSpPr/>
+          <p:nvPr/>
+        </p:nvSpPr>
+        <p:spPr>
+          <a:xfrm>
+            <a:off x="4663440" y="3291840"/>
+            <a:ext cx="4069080" cy="914400"/>
+          </a:xfrm>
+          <a:prstGeom prst="roundRect">
+            <a:avLst/>
+          </a:prstGeom>
+          <a:solidFill>
+            <a:srgbClr val="F6E8E6"/>
+          </a:solidFill>
+          <a:ln w="12700">
+            <a:solidFill>
+              <a:srgbClr val="A33B38"/>
+            </a:solidFill>
+          </a:ln>
+        </p:spPr>
+        <p:txBody>
+          <a:bodyPr wrap="square" lIns="73152" rIns="73152" tIns="36576" bIns="36576" anchor="ctr"/>
+          <a:lstStyle/>
+          <a:p>
+            <a:pPr algn="ctr">
+              <a:lnSpc>
+                <a:spcPct val="100000"/>
+              </a:lnSpc>
+              <a:buNone/>
+            </a:pPr>
+            <a:r>
+              <a:rPr lang="zh-CN" altLang="en-US" sz="2000" b="0">
+                <a:solidFill>
+                  <a:srgbClr val="262626"/>
+                </a:solidFill>
+                <a:latin typeface="微软雅黑"/>
+                <a:ea typeface="微软雅黑"/>
+              </a:rPr>
+              <a:t>没跑到的失败方式仍然可能存在</a:t>
+            </a:r>
+            <a:endParaRPr lang="zh-CN" sz="2000">
+              <a:latin typeface="微软雅黑"/>
+              <a:ea typeface="微软雅黑"/>
+            </a:endParaRPr>
+          </a:p>
+        </p:txBody>
+      </p:sp>
+      <p:sp>
+        <p:nvSpPr>
+          <p:cNvPr id="106" name="fig"/>
+          <p:cNvSpPr/>
+          <p:nvPr/>
+        </p:nvSpPr>
+        <p:spPr>
+          <a:xfrm>
+            <a:off x="411480" y="4434840"/>
+            <a:ext cx="8321040" cy="868680"/>
+          </a:xfrm>
+          <a:prstGeom prst="rect">
+            <a:avLst/>
+          </a:prstGeom>
+          <a:solidFill>
+            <a:srgbClr val="A33B38"/>
+          </a:solidFill>
+          <a:ln w="12700">
+            <a:solidFill>
+              <a:srgbClr val="A33B38"/>
+            </a:solidFill>
+          </a:ln>
+        </p:spPr>
+        <p:txBody>
+          <a:bodyPr wrap="square" lIns="73152" rIns="73152" tIns="36576" bIns="36576" anchor="ctr"/>
+          <a:lstStyle/>
+          <a:p>
+            <a:pPr algn="ctr">
+              <a:lnSpc>
+                <a:spcPct val="100000"/>
+              </a:lnSpc>
+              <a:buNone/>
+            </a:pPr>
+            <a:r>
+              <a:rPr lang="zh-CN" altLang="en-US" sz="2600" b="1">
+                <a:solidFill>
+                  <a:srgbClr val="FFFFFF"/>
+                </a:solidFill>
+                <a:latin typeface="微软雅黑"/>
+                <a:ea typeface="微软雅黑"/>
+              </a:rPr>
+              <a:t>绿灯还要看期望从哪来</a:t>
+            </a:r>
+            <a:endParaRPr lang="zh-CN" sz="2600">
+              <a:latin typeface="微软雅黑"/>
+              <a:ea typeface="微软雅黑"/>
+            </a:endParaRPr>
+          </a:p>
+        </p:txBody>
+      </p:sp>
+      <p:sp>
+        <p:nvSpPr>
+          <p:cNvPr id="107" name="sec-label"/>
           <p:cNvSpPr txBox="1"/>
           <p:nvPr/>
         </p:nvSpPr>
